--- a/lessons/6-2/slides.pptx
+++ b/lessons/6-2/slides.pptx
@@ -10925,7 +10925,7 @@
       </p:sp>
       <p:sp>
         <p:nvSpPr>
-          <p:cNvPr id="20" name="Shape 18"/>
+          <p:cNvPr id="20" name="Text 18"/>
           <p:cNvSpPr/>
           <p:nvPr/>
         </p:nvSpPr>
@@ -10946,33 +10946,7 @@
             <a:solidFill>
               <a:srgbClr val="D6DBDF"/>
             </a:solidFill>
-            <a:prstDash val="solid"/>
           </a:ln>
-          <a:effectLst>
-            <a:outerShdw sx="100000" sy="100000" kx="0" ky="0" algn="bl" rotWithShape="0" blurRad="50800" dist="12700" dir="5400000">
-              <a:srgbClr val="1C2E42">
-                <a:alpha val="10000"/>
-              </a:srgbClr>
-            </a:outerShdw>
-          </a:effectLst>
-        </p:spPr>
-      </p:sp>
-      <p:sp>
-        <p:nvSpPr>
-          <p:cNvPr id="21" name="Text 19"/>
-          <p:cNvSpPr/>
-          <p:nvPr/>
-        </p:nvSpPr>
-        <p:spPr>
-          <a:xfrm>
-            <a:off x="685800" y="1481328"/>
-            <a:ext cx="1447800" cy="384048"/>
-          </a:xfrm>
-          <a:prstGeom prst="rect">
-            <a:avLst/>
-          </a:prstGeom>
-          <a:noFill/>
-          <a:ln/>
         </p:spPr>
         <p:txBody>
           <a:bodyPr wrap="square" rtlCol="0" anchor="ctr"/>
@@ -10982,7 +10956,7 @@
               <a:buNone/>
             </a:pPr>
             <a:r>
-              <a:rPr lang="en-US" sz="900" dirty="0">
+              <a:rPr lang="en-US" sz="900" b="1" dirty="0">
                 <a:solidFill>
                   <a:srgbClr val="17324D"/>
                 </a:solidFill>
@@ -10998,7 +10972,7 @@
       </p:sp>
       <p:sp>
         <p:nvSpPr>
-          <p:cNvPr id="22" name="Shape 20"/>
+          <p:cNvPr id="21" name="Text 19"/>
           <p:cNvSpPr/>
           <p:nvPr/>
         </p:nvSpPr>
@@ -11019,33 +10993,7 @@
             <a:solidFill>
               <a:srgbClr val="D6DBDF"/>
             </a:solidFill>
-            <a:prstDash val="solid"/>
           </a:ln>
-          <a:effectLst>
-            <a:outerShdw sx="100000" sy="100000" kx="0" ky="0" algn="bl" rotWithShape="0" blurRad="50800" dist="12700" dir="5400000">
-              <a:srgbClr val="1C2E42">
-                <a:alpha val="10000"/>
-              </a:srgbClr>
-            </a:outerShdw>
-          </a:effectLst>
-        </p:spPr>
-      </p:sp>
-      <p:sp>
-        <p:nvSpPr>
-          <p:cNvPr id="23" name="Text 21"/>
-          <p:cNvSpPr/>
-          <p:nvPr/>
-        </p:nvSpPr>
-        <p:spPr>
-          <a:xfrm>
-            <a:off x="2453640" y="1481328"/>
-            <a:ext cx="1447800" cy="384048"/>
-          </a:xfrm>
-          <a:prstGeom prst="rect">
-            <a:avLst/>
-          </a:prstGeom>
-          <a:noFill/>
-          <a:ln/>
         </p:spPr>
         <p:txBody>
           <a:bodyPr wrap="square" rtlCol="0" anchor="ctr"/>
@@ -11055,7 +11003,7 @@
               <a:buNone/>
             </a:pPr>
             <a:r>
-              <a:rPr lang="en-US" sz="900" dirty="0">
+              <a:rPr lang="en-US" sz="900" b="1" dirty="0">
                 <a:solidFill>
                   <a:srgbClr val="17324D"/>
                 </a:solidFill>
@@ -11071,7 +11019,7 @@
       </p:sp>
       <p:sp>
         <p:nvSpPr>
-          <p:cNvPr id="24" name="Shape 22"/>
+          <p:cNvPr id="22" name="Text 20"/>
           <p:cNvSpPr/>
           <p:nvPr/>
         </p:nvSpPr>
@@ -11092,33 +11040,7 @@
             <a:solidFill>
               <a:srgbClr val="D6DBDF"/>
             </a:solidFill>
-            <a:prstDash val="solid"/>
           </a:ln>
-          <a:effectLst>
-            <a:outerShdw sx="100000" sy="100000" kx="0" ky="0" algn="bl" rotWithShape="0" blurRad="50800" dist="12700" dir="5400000">
-              <a:srgbClr val="1C2E42">
-                <a:alpha val="10000"/>
-              </a:srgbClr>
-            </a:outerShdw>
-          </a:effectLst>
-        </p:spPr>
-      </p:sp>
-      <p:sp>
-        <p:nvSpPr>
-          <p:cNvPr id="25" name="Text 23"/>
-          <p:cNvSpPr/>
-          <p:nvPr/>
-        </p:nvSpPr>
-        <p:spPr>
-          <a:xfrm>
-            <a:off x="4221480" y="1481328"/>
-            <a:ext cx="1447800" cy="384048"/>
-          </a:xfrm>
-          <a:prstGeom prst="rect">
-            <a:avLst/>
-          </a:prstGeom>
-          <a:noFill/>
-          <a:ln/>
         </p:spPr>
         <p:txBody>
           <a:bodyPr wrap="square" rtlCol="0" anchor="ctr"/>
@@ -11128,7 +11050,7 @@
               <a:buNone/>
             </a:pPr>
             <a:r>
-              <a:rPr lang="en-US" sz="900" dirty="0">
+              <a:rPr lang="en-US" sz="900" b="1" dirty="0">
                 <a:solidFill>
                   <a:srgbClr val="17324D"/>
                 </a:solidFill>
@@ -11144,7 +11066,7 @@
       </p:sp>
       <p:sp>
         <p:nvSpPr>
-          <p:cNvPr id="26" name="Shape 24"/>
+          <p:cNvPr id="23" name="Text 21"/>
           <p:cNvSpPr/>
           <p:nvPr/>
         </p:nvSpPr>
@@ -11165,33 +11087,7 @@
             <a:solidFill>
               <a:srgbClr val="D6DBDF"/>
             </a:solidFill>
-            <a:prstDash val="solid"/>
           </a:ln>
-          <a:effectLst>
-            <a:outerShdw sx="100000" sy="100000" kx="0" ky="0" algn="bl" rotWithShape="0" blurRad="50800" dist="12700" dir="5400000">
-              <a:srgbClr val="1C2E42">
-                <a:alpha val="10000"/>
-              </a:srgbClr>
-            </a:outerShdw>
-          </a:effectLst>
-        </p:spPr>
-      </p:sp>
-      <p:sp>
-        <p:nvSpPr>
-          <p:cNvPr id="27" name="Text 25"/>
-          <p:cNvSpPr/>
-          <p:nvPr/>
-        </p:nvSpPr>
-        <p:spPr>
-          <a:xfrm>
-            <a:off x="685800" y="1975104"/>
-            <a:ext cx="1447800" cy="384048"/>
-          </a:xfrm>
-          <a:prstGeom prst="rect">
-            <a:avLst/>
-          </a:prstGeom>
-          <a:noFill/>
-          <a:ln/>
         </p:spPr>
         <p:txBody>
           <a:bodyPr wrap="square" rtlCol="0" anchor="ctr"/>
@@ -11201,7 +11097,7 @@
               <a:buNone/>
             </a:pPr>
             <a:r>
-              <a:rPr lang="en-US" sz="900" dirty="0">
+              <a:rPr lang="en-US" sz="900" b="1" dirty="0">
                 <a:solidFill>
                   <a:srgbClr val="17324D"/>
                 </a:solidFill>
@@ -11217,7 +11113,7 @@
       </p:sp>
       <p:sp>
         <p:nvSpPr>
-          <p:cNvPr id="28" name="Shape 26"/>
+          <p:cNvPr id="24" name="Shape 22"/>
           <p:cNvSpPr/>
           <p:nvPr/>
         </p:nvSpPr>
@@ -11251,7 +11147,7 @@
       </p:sp>
       <p:sp>
         <p:nvSpPr>
-          <p:cNvPr id="29" name="Text 27"/>
+          <p:cNvPr id="25" name="Text 23"/>
           <p:cNvSpPr/>
           <p:nvPr/>
         </p:nvSpPr>
@@ -11292,7 +11188,7 @@
       </p:sp>
       <p:sp>
         <p:nvSpPr>
-          <p:cNvPr id="30" name="Shape 28"/>
+          <p:cNvPr id="26" name="Shape 24"/>
           <p:cNvSpPr/>
           <p:nvPr/>
         </p:nvSpPr>
@@ -11326,7 +11222,7 @@
       </p:sp>
       <p:sp>
         <p:nvSpPr>
-          <p:cNvPr id="31" name="Text 29"/>
+          <p:cNvPr id="27" name="Text 25"/>
           <p:cNvSpPr/>
           <p:nvPr/>
         </p:nvSpPr>
@@ -11367,7 +11263,7 @@
       </p:sp>
       <p:sp>
         <p:nvSpPr>
-          <p:cNvPr id="32" name="Shape 30"/>
+          <p:cNvPr id="28" name="Shape 26"/>
           <p:cNvSpPr/>
           <p:nvPr/>
         </p:nvSpPr>
@@ -11401,7 +11297,7 @@
       </p:sp>
       <p:sp>
         <p:nvSpPr>
-          <p:cNvPr id="33" name="Text 31"/>
+          <p:cNvPr id="29" name="Text 27"/>
           <p:cNvSpPr/>
           <p:nvPr/>
         </p:nvSpPr>
@@ -11442,7 +11338,7 @@
       </p:sp>
       <p:sp>
         <p:nvSpPr>
-          <p:cNvPr id="34" name="Text 32"/>
+          <p:cNvPr id="30" name="Text 28"/>
           <p:cNvSpPr/>
           <p:nvPr/>
         </p:nvSpPr>
@@ -11481,7 +11377,7 @@
       </p:sp>
       <p:sp>
         <p:nvSpPr>
-          <p:cNvPr id="35" name="Shape 33"/>
+          <p:cNvPr id="31" name="Shape 29"/>
           <p:cNvSpPr/>
           <p:nvPr/>
         </p:nvSpPr>
@@ -11504,7 +11400,7 @@
       </p:sp>
       <p:sp>
         <p:nvSpPr>
-          <p:cNvPr id="36" name="Shape 34"/>
+          <p:cNvPr id="32" name="Shape 30"/>
           <p:cNvSpPr/>
           <p:nvPr/>
         </p:nvSpPr>
@@ -11527,7 +11423,7 @@
       </p:sp>
       <p:sp>
         <p:nvSpPr>
-          <p:cNvPr id="37" name="Shape 35"/>
+          <p:cNvPr id="33" name="Shape 31"/>
           <p:cNvSpPr/>
           <p:nvPr/>
         </p:nvSpPr>
@@ -11550,7 +11446,7 @@
       </p:sp>
       <p:sp>
         <p:nvSpPr>
-          <p:cNvPr id="38" name="Shape 36"/>
+          <p:cNvPr id="34" name="Shape 32"/>
           <p:cNvSpPr/>
           <p:nvPr/>
         </p:nvSpPr>
@@ -11573,7 +11469,7 @@
       </p:sp>
       <p:sp>
         <p:nvSpPr>
-          <p:cNvPr id="39" name="Shape 37"/>
+          <p:cNvPr id="35" name="Shape 33"/>
           <p:cNvSpPr/>
           <p:nvPr/>
         </p:nvSpPr>

--- a/lessons/6-2/slides.pptx
+++ b/lessons/6-2/slides.pptx
@@ -2495,7 +2495,7 @@
                 <a:ea typeface="Outfit" pitchFamily="34" charset="-122"/>
                 <a:cs typeface="Outfit" pitchFamily="34" charset="-120"/>
               </a:rPr>
-              <a:t>6.EE.2c</a:t>
+              <a:t>6.AT.6c</a:t>
             </a:r>
             <a:endParaRPr lang="en-US" sz="1000" dirty="0"/>
           </a:p>
@@ -3218,7 +3218,7 @@
                 <a:ea typeface="Outfit" pitchFamily="34" charset="-122"/>
                 <a:cs typeface="Outfit" pitchFamily="34" charset="-120"/>
               </a:rPr>
-              <a:t>6.EE.2c</a:t>
+              <a:t>6.AT.6c</a:t>
             </a:r>
             <a:endParaRPr lang="en-US" sz="900" dirty="0"/>
           </a:p>
@@ -4328,7 +4328,7 @@
                 <a:ea typeface="Outfit" pitchFamily="34" charset="-122"/>
                 <a:cs typeface="Outfit" pitchFamily="34" charset="-120"/>
               </a:rPr>
-              <a:t>6.EE.2c</a:t>
+              <a:t>6.AT.6c</a:t>
             </a:r>
             <a:endParaRPr lang="en-US" sz="900" dirty="0"/>
           </a:p>
@@ -5664,7 +5664,7 @@
                 <a:ea typeface="Outfit" pitchFamily="34" charset="-122"/>
                 <a:cs typeface="Outfit" pitchFamily="34" charset="-120"/>
               </a:rPr>
-              <a:t>6.EE.2c</a:t>
+              <a:t>6.AT.6c</a:t>
             </a:r>
             <a:endParaRPr lang="en-US" sz="900" dirty="0"/>
           </a:p>
@@ -6958,7 +6958,7 @@
                 <a:ea typeface="Outfit" pitchFamily="34" charset="-122"/>
                 <a:cs typeface="Outfit" pitchFamily="34" charset="-120"/>
               </a:rPr>
-              <a:t>6.EE.2c</a:t>
+              <a:t>6.AT.6c</a:t>
             </a:r>
             <a:endParaRPr lang="en-US" sz="900" dirty="0"/>
           </a:p>
@@ -8020,7 +8020,7 @@
                 <a:ea typeface="Outfit" pitchFamily="34" charset="-122"/>
                 <a:cs typeface="Outfit" pitchFamily="34" charset="-120"/>
               </a:rPr>
-              <a:t>6.EE.2c</a:t>
+              <a:t>6.AT.6c</a:t>
             </a:r>
             <a:endParaRPr lang="en-US" sz="900" dirty="0"/>
           </a:p>
@@ -8985,7 +8985,7 @@
                 <a:ea typeface="Outfit" pitchFamily="34" charset="-122"/>
                 <a:cs typeface="Outfit" pitchFamily="34" charset="-120"/>
               </a:rPr>
-              <a:t>6.EE.2c</a:t>
+              <a:t>6.AT.6c</a:t>
             </a:r>
             <a:endParaRPr lang="en-US" sz="900" dirty="0"/>
           </a:p>
@@ -9902,7 +9902,7 @@
                 <a:ea typeface="Outfit" pitchFamily="34" charset="-122"/>
                 <a:cs typeface="Outfit" pitchFamily="34" charset="-120"/>
               </a:rPr>
-              <a:t>6.EE.2c</a:t>
+              <a:t>6.AT.6c</a:t>
             </a:r>
             <a:endParaRPr lang="en-US" sz="900" dirty="0"/>
           </a:p>
@@ -10657,7 +10657,7 @@
                 <a:ea typeface="Hanken Grotesk" pitchFamily="34" charset="-122"/>
                 <a:cs typeface="Hanken Grotesk" pitchFamily="34" charset="-120"/>
               </a:rPr>
-              <a:t>B.  32</a:t>
+              <a:t>B.  34</a:t>
             </a:r>
             <a:endParaRPr lang="en-US" sz="1000" dirty="0"/>
           </a:p>
@@ -10696,7 +10696,7 @@
                 <a:ea typeface="Hanken Grotesk" pitchFamily="34" charset="-122"/>
                 <a:cs typeface="Hanken Grotesk" pitchFamily="34" charset="-120"/>
               </a:rPr>
-              <a:t>C.  17</a:t>
+              <a:t>C.  20</a:t>
             </a:r>
             <a:endParaRPr lang="en-US" sz="1000" dirty="0"/>
           </a:p>
@@ -10735,7 +10735,7 @@
                 <a:ea typeface="Hanken Grotesk" pitchFamily="34" charset="-122"/>
                 <a:cs typeface="Hanken Grotesk" pitchFamily="34" charset="-120"/>
               </a:rPr>
-              <a:t>D.  36</a:t>
+              <a:t>D.  18</a:t>
             </a:r>
             <a:endParaRPr lang="en-US" sz="1000" dirty="0"/>
           </a:p>
@@ -11030,7 +11030,7 @@
                 <a:ea typeface="Outfit" pitchFamily="34" charset="-122"/>
                 <a:cs typeface="Outfit" pitchFamily="34" charset="-120"/>
               </a:rPr>
-              <a:t>6.EE.2c</a:t>
+              <a:t>6.AT.6c</a:t>
             </a:r>
             <a:endParaRPr lang="en-US" sz="900" dirty="0"/>
           </a:p>
@@ -12463,7 +12463,7 @@
                 <a:ea typeface="Outfit" pitchFamily="34" charset="-122"/>
                 <a:cs typeface="Outfit" pitchFamily="34" charset="-120"/>
               </a:rPr>
-              <a:t>6.EE.2c</a:t>
+              <a:t>6.AT.6c</a:t>
             </a:r>
             <a:endParaRPr lang="en-US" sz="900" dirty="0"/>
           </a:p>
@@ -13277,7 +13277,7 @@
                 <a:ea typeface="Outfit" pitchFamily="34" charset="-122"/>
                 <a:cs typeface="Outfit" pitchFamily="34" charset="-120"/>
               </a:rPr>
-              <a:t>6.EE.2c</a:t>
+              <a:t>6.AT.6c</a:t>
             </a:r>
             <a:endParaRPr lang="en-US" sz="900" dirty="0"/>
           </a:p>
@@ -14337,7 +14337,7 @@
                 <a:ea typeface="Outfit" pitchFamily="34" charset="-122"/>
                 <a:cs typeface="Outfit" pitchFamily="34" charset="-120"/>
               </a:rPr>
-              <a:t>6.EE.2c</a:t>
+              <a:t>6.AT.6c</a:t>
             </a:r>
             <a:endParaRPr lang="en-US" sz="900" dirty="0"/>
           </a:p>
@@ -15397,7 +15397,7 @@
                 <a:ea typeface="Outfit" pitchFamily="34" charset="-122"/>
                 <a:cs typeface="Outfit" pitchFamily="34" charset="-120"/>
               </a:rPr>
-              <a:t>6.EE.2c</a:t>
+              <a:t>6.AT.6c</a:t>
             </a:r>
             <a:endParaRPr lang="en-US" sz="900" dirty="0"/>
           </a:p>
@@ -16457,7 +16457,7 @@
                 <a:ea typeface="Outfit" pitchFamily="34" charset="-122"/>
                 <a:cs typeface="Outfit" pitchFamily="34" charset="-120"/>
               </a:rPr>
-              <a:t>6.EE.2c</a:t>
+              <a:t>6.AT.6c</a:t>
             </a:r>
             <a:endParaRPr lang="en-US" sz="900" dirty="0"/>
           </a:p>
@@ -17517,7 +17517,7 @@
                 <a:ea typeface="Outfit" pitchFamily="34" charset="-122"/>
                 <a:cs typeface="Outfit" pitchFamily="34" charset="-120"/>
               </a:rPr>
-              <a:t>6.EE.2c</a:t>
+              <a:t>6.AT.6c</a:t>
             </a:r>
             <a:endParaRPr lang="en-US" sz="900" dirty="0"/>
           </a:p>
@@ -18505,7 +18505,7 @@
                 <a:ea typeface="Outfit" pitchFamily="34" charset="-122"/>
                 <a:cs typeface="Outfit" pitchFamily="34" charset="-120"/>
               </a:rPr>
-              <a:t>6.EE.2c</a:t>
+              <a:t>6.AT.6c</a:t>
             </a:r>
             <a:endParaRPr lang="en-US" sz="900" dirty="0"/>
           </a:p>
@@ -20684,7 +20684,7 @@
                 <a:ea typeface="Outfit" pitchFamily="34" charset="-122"/>
                 <a:cs typeface="Outfit" pitchFamily="34" charset="-120"/>
               </a:rPr>
-              <a:t>6.EE.2c</a:t>
+              <a:t>6.AT.6c</a:t>
             </a:r>
             <a:endParaRPr lang="en-US" sz="900" dirty="0"/>
           </a:p>

--- a/lessons/6-2/slides.pptx
+++ b/lessons/6-2/slides.pptx
@@ -694,7 +694,7 @@
           <a:p>
             <a:r>
               <a:rPr lang="en-US" dirty="0"/>
-              <a:t>Answer key — 4(2²) + 3 = 4(4) + 3 = 16 + 3 = 19. Square the 2 first, THEN multiply by 4.</a:t>
+              <a:t>Answer key — The student forgot to flip. 2/5 × 4/3 (flip the divisor 3/4 to get 4/3). Then 2/5 × 4/3 = 8/15.</a:t>
             </a:r>
             <a:endParaRPr lang="en-US" dirty="0"/>
           </a:p>
@@ -2334,7 +2334,7 @@
             <a:avLst/>
           </a:prstGeom>
           <a:solidFill>
-            <a:srgbClr val="7A5C8E">
+            <a:srgbClr val="2E7D9A">
               <a:alpha val="35000"/>
             </a:srgbClr>
           </a:solidFill>
@@ -2410,7 +2410,7 @@
                   <a:srgbClr val="000000"/>
                 </a:solidFill>
               </a:rPr>
-              <a:t>🎵</a:t>
+              <a:t>🔍</a:t>
             </a:r>
             <a:endParaRPr lang="en-US" sz="4400" dirty="0"/>
           </a:p>
@@ -2452,7 +2452,7 @@
                 <a:ea typeface="Outfit" pitchFamily="34" charset="-122"/>
                 <a:cs typeface="Outfit" pitchFamily="34" charset="-120"/>
               </a:rPr>
-              <a:t>Evaluate Expressions</a:t>
+              <a:t>Divide Fractions</a:t>
             </a:r>
             <a:endParaRPr lang="en-US" sz="3000" dirty="0"/>
           </a:p>
@@ -2475,7 +2475,7 @@
             </a:avLst>
           </a:prstGeom>
           <a:solidFill>
-            <a:srgbClr val="7A5C8E"/>
+            <a:srgbClr val="2E7D9A"/>
           </a:solidFill>
           <a:ln/>
         </p:spPr>
@@ -2495,7 +2495,7 @@
                 <a:ea typeface="Outfit" pitchFamily="34" charset="-122"/>
                 <a:cs typeface="Outfit" pitchFamily="34" charset="-120"/>
               </a:rPr>
-              <a:t>6.AT.6c</a:t>
+              <a:t>6.NOS.1</a:t>
             </a:r>
             <a:endParaRPr lang="en-US" sz="1000" dirty="0"/>
           </a:p>
@@ -2534,7 +2534,7 @@
                 <a:ea typeface="Hanken Grotesk" pitchFamily="34" charset="-122"/>
                 <a:cs typeface="Hanken Grotesk" pitchFamily="34" charset="-120"/>
               </a:rPr>
-              <a:t>Unit 6  ·  Lesson 6-2</a:t>
+              <a:t>Unit 2  ·  Lesson 2-3</a:t>
             </a:r>
             <a:endParaRPr lang="en-US" sz="1000" dirty="0"/>
           </a:p>
@@ -2860,7 +2860,7 @@
             <a:r>
               <a:rPr lang="en-US" sz="1100" b="1" dirty="0">
                 <a:solidFill>
-                  <a:srgbClr val="7A5C8E"/>
+                  <a:srgbClr val="2E7D9A"/>
                 </a:solidFill>
                 <a:latin typeface="Outfit" pitchFamily="34" charset="0"/>
                 <a:ea typeface="Outfit" pitchFamily="34" charset="-122"/>
@@ -2919,7 +2919,7 @@
                 <a:ea typeface="Hanken Grotesk" pitchFamily="34" charset="-122"/>
                 <a:cs typeface="Hanken Grotesk" pitchFamily="34" charset="-120"/>
               </a:rPr>
-              <a:t>I can evaluate algebraic expressions by substituting values for the variables.</a:t>
+              <a:t>I can divide a fraction by a fraction by multiplying by the reciprocal and simplifying.</a:t>
             </a:r>
             <a:endParaRPr lang="en-US" sz="1100" dirty="0"/>
           </a:p>
@@ -2986,7 +2986,7 @@
             <a:r>
               <a:rPr lang="en-US" sz="1100" b="1" dirty="0">
                 <a:solidFill>
-                  <a:srgbClr val="7A5C8E"/>
+                  <a:srgbClr val="2E7D9A"/>
                 </a:solidFill>
                 <a:latin typeface="Outfit" pitchFamily="34" charset="0"/>
                 <a:ea typeface="Outfit" pitchFamily="34" charset="-122"/>
@@ -3045,7 +3045,7 @@
                 <a:ea typeface="Hanken Grotesk" pitchFamily="34" charset="-122"/>
                 <a:cs typeface="Hanken Grotesk" pitchFamily="34" charset="-120"/>
               </a:rPr>
-              <a:t>I can explain my steps using the words variable, expression, evaluate, and substitute.</a:t>
+              <a:t>I can explain my steps using the words dividend, divisor, reciprocal, quotient, and simplify.</a:t>
             </a:r>
             <a:endParaRPr lang="en-US" sz="1050" dirty="0"/>
           </a:p>
@@ -3198,7 +3198,7 @@
             </a:avLst>
           </a:prstGeom>
           <a:solidFill>
-            <a:srgbClr val="7A5C8E"/>
+            <a:srgbClr val="2E7D9A"/>
           </a:solidFill>
           <a:ln/>
         </p:spPr>
@@ -3218,7 +3218,7 @@
                 <a:ea typeface="Outfit" pitchFamily="34" charset="-122"/>
                 <a:cs typeface="Outfit" pitchFamily="34" charset="-120"/>
               </a:rPr>
-              <a:t>6.AT.6c</a:t>
+              <a:t>6.NOS.1</a:t>
             </a:r>
             <a:endParaRPr lang="en-US" sz="900" dirty="0"/>
           </a:p>
@@ -3437,7 +3437,7 @@
                 <a:ea typeface="Hanken Grotesk" pitchFamily="34" charset="-122"/>
                 <a:cs typeface="Hanken Grotesk" pitchFamily="34" charset="-120"/>
               </a:rPr>
-              <a:t>Reveal Math Grade 6  ·  Unit 6  ·  Lesson 6-2</a:t>
+              <a:t>Reveal Math Grade 6  ·  Unit 2  ·  Lesson 2-3</a:t>
             </a:r>
             <a:endParaRPr lang="en-US" sz="750" dirty="0"/>
           </a:p>
@@ -3549,7 +3549,7 @@
                 <a:ea typeface="Outfit" pitchFamily="34" charset="-122"/>
                 <a:cs typeface="Outfit" pitchFamily="34" charset="-120"/>
               </a:rPr>
-              <a:t>Evaluate the expression 150 + 12s for each number of speakers.</a:t>
+              <a:t>Use the bar model to see how many 1/8-pound portions fit into 3/4 pound.</a:t>
             </a:r>
             <a:endParaRPr lang="en-US" sz="1050" dirty="0"/>
           </a:p>
@@ -3803,7 +3803,7 @@
           </a:solidFill>
           <a:ln w="12700">
             <a:solidFill>
-              <a:srgbClr val="7A5C8E"/>
+              <a:srgbClr val="2E7D9A"/>
             </a:solidFill>
             <a:prstDash val="solid"/>
           </a:ln>
@@ -3831,7 +3831,7 @@
             <a:avLst/>
           </a:prstGeom>
           <a:solidFill>
-            <a:srgbClr val="7A5C8E"/>
+            <a:srgbClr val="2E7D9A"/>
           </a:solidFill>
           <a:ln/>
         </p:spPr>
@@ -3878,7 +3878,7 @@
           </a:solidFill>
           <a:ln w="12700">
             <a:solidFill>
-              <a:srgbClr val="7A5C8E"/>
+              <a:srgbClr val="2E7D9A"/>
             </a:solidFill>
             <a:prstDash val="solid"/>
           </a:ln>
@@ -3906,7 +3906,7 @@
             <a:avLst/>
           </a:prstGeom>
           <a:solidFill>
-            <a:srgbClr val="7A5C8E"/>
+            <a:srgbClr val="2E7D9A"/>
           </a:solidFill>
           <a:ln/>
         </p:spPr>
@@ -4040,7 +4040,7 @@
                 <a:ea typeface="Hanken Grotesk" pitchFamily="34" charset="-122"/>
                 <a:cs typeface="Hanken Grotesk" pitchFamily="34" charset="-120"/>
               </a:rPr>
-              <a:t>When you evaluate an expression like 4x² + 3, what order do you follow, and why must you square before you multiply?</a:t>
+              <a:t>Why do we multiply by the reciprocal when we divide one fraction by another?</a:t>
             </a:r>
             <a:endParaRPr lang="en-US" sz="1000" dirty="0"/>
           </a:p>
@@ -4308,7 +4308,7 @@
             </a:avLst>
           </a:prstGeom>
           <a:solidFill>
-            <a:srgbClr val="7A5C8E"/>
+            <a:srgbClr val="2E7D9A"/>
           </a:solidFill>
           <a:ln/>
         </p:spPr>
@@ -4328,7 +4328,7 @@
                 <a:ea typeface="Outfit" pitchFamily="34" charset="-122"/>
                 <a:cs typeface="Outfit" pitchFamily="34" charset="-120"/>
               </a:rPr>
-              <a:t>6.AT.6c</a:t>
+              <a:t>6.NOS.1</a:t>
             </a:r>
             <a:endParaRPr lang="en-US" sz="900" dirty="0"/>
           </a:p>
@@ -4547,7 +4547,7 @@
                 <a:ea typeface="Hanken Grotesk" pitchFamily="34" charset="-122"/>
                 <a:cs typeface="Hanken Grotesk" pitchFamily="34" charset="-120"/>
               </a:rPr>
-              <a:t>Reveal Math Grade 6  ·  Unit 6  ·  Lesson 6-2</a:t>
+              <a:t>Reveal Math Grade 6  ·  Unit 2  ·  Lesson 2-3</a:t>
             </a:r>
             <a:endParaRPr lang="en-US" sz="750" dirty="0"/>
           </a:p>
@@ -4702,7 +4702,7 @@
                 <a:ea typeface="Outfit" pitchFamily="34" charset="-122"/>
                 <a:cs typeface="Outfit" pitchFamily="34" charset="-120"/>
               </a:rPr>
-              <a:t>Find the Evaluation Error</a:t>
+              <a:t>Find the Division Error</a:t>
             </a:r>
             <a:endParaRPr lang="en-US" sz="1100" dirty="0"/>
           </a:p>
@@ -4867,7 +4867,7 @@
                 <a:ea typeface="Hanken Grotesk" pitchFamily="34" charset="-122"/>
                 <a:cs typeface="Hanken Grotesk" pitchFamily="34" charset="-120"/>
               </a:rPr>
-              <a:t>Expression:  </a:t>
+              <a:t>Problem:  </a:t>
             </a:r>
             <a:pPr indent="0" marL="0">
               <a:buNone/>
@@ -4881,7 +4881,7 @@
                 <a:ea typeface="Courier New" pitchFamily="34" charset="-122"/>
                 <a:cs typeface="Courier New" pitchFamily="34" charset="-120"/>
               </a:rPr>
-              <a:t>4x² + 3 when x = 2</a:t>
+              <a:t>2/5 ÷ 3/4</a:t>
             </a:r>
             <a:endParaRPr lang="en-US" sz="950" dirty="0"/>
           </a:p>
@@ -4934,7 +4934,7 @@
                 <a:ea typeface="Hanken Grotesk" pitchFamily="34" charset="-122"/>
                 <a:cs typeface="Hanken Grotesk" pitchFamily="34" charset="-120"/>
               </a:rPr>
-              <a:t>Substitute:  </a:t>
+              <a:t>Keep, Change, Flip:  </a:t>
             </a:r>
             <a:pPr indent="0" marL="0">
               <a:buNone/>
@@ -4948,7 +4948,7 @@
                 <a:ea typeface="Courier New" pitchFamily="34" charset="-122"/>
                 <a:cs typeface="Courier New" pitchFamily="34" charset="-120"/>
               </a:rPr>
-              <a:t>4(2)² + 3</a:t>
+              <a:t>2/5 × 3/4</a:t>
             </a:r>
             <a:endParaRPr lang="en-US" sz="950" dirty="0"/>
           </a:p>
@@ -5001,7 +5001,7 @@
                 <a:ea typeface="Hanken Grotesk" pitchFamily="34" charset="-122"/>
                 <a:cs typeface="Hanken Grotesk" pitchFamily="34" charset="-120"/>
               </a:rPr>
-              <a:t>Apply exponent:  </a:t>
+              <a:t>Multiply:  </a:t>
             </a:r>
             <a:pPr indent="0" marL="0">
               <a:buNone/>
@@ -5015,7 +5015,7 @@
                 <a:ea typeface="Courier New" pitchFamily="34" charset="-122"/>
                 <a:cs typeface="Courier New" pitchFamily="34" charset="-120"/>
               </a:rPr>
-              <a:t>(4 × 2)² + 3 = 8² + 3</a:t>
+              <a:t>6/20</a:t>
             </a:r>
             <a:endParaRPr lang="en-US" sz="950" dirty="0"/>
           </a:p>
@@ -5068,7 +5068,7 @@
                 <a:ea typeface="Hanken Grotesk" pitchFamily="34" charset="-122"/>
                 <a:cs typeface="Hanken Grotesk" pitchFamily="34" charset="-120"/>
               </a:rPr>
-              <a:t>Calculate:  </a:t>
+              <a:t>Simplify:  </a:t>
             </a:r>
             <a:pPr indent="0" marL="0">
               <a:buNone/>
@@ -5082,7 +5082,7 @@
                 <a:ea typeface="Courier New" pitchFamily="34" charset="-122"/>
                 <a:cs typeface="Courier New" pitchFamily="34" charset="-120"/>
               </a:rPr>
-              <a:t>64 + 3 = 67</a:t>
+              <a:t>3/10</a:t>
             </a:r>
             <a:endParaRPr lang="en-US" sz="950" dirty="0"/>
           </a:p>
@@ -5644,7 +5644,7 @@
             </a:avLst>
           </a:prstGeom>
           <a:solidFill>
-            <a:srgbClr val="7A5C8E"/>
+            <a:srgbClr val="2E7D9A"/>
           </a:solidFill>
           <a:ln/>
         </p:spPr>
@@ -5664,7 +5664,7 @@
                 <a:ea typeface="Outfit" pitchFamily="34" charset="-122"/>
                 <a:cs typeface="Outfit" pitchFamily="34" charset="-120"/>
               </a:rPr>
-              <a:t>6.AT.6c</a:t>
+              <a:t>6.NOS.1</a:t>
             </a:r>
             <a:endParaRPr lang="en-US" sz="900" dirty="0"/>
           </a:p>
@@ -5883,7 +5883,7 @@
                 <a:ea typeface="Hanken Grotesk" pitchFamily="34" charset="-122"/>
                 <a:cs typeface="Hanken Grotesk" pitchFamily="34" charset="-120"/>
               </a:rPr>
-              <a:t>Reveal Math Grade 6  ·  Unit 6  ·  Lesson 6-2</a:t>
+              <a:t>Reveal Math Grade 6  ·  Unit 2  ·  Lesson 2-3</a:t>
             </a:r>
             <a:endParaRPr lang="en-US" sz="750" dirty="0"/>
           </a:p>
@@ -6018,7 +6018,7 @@
             <a:avLst/>
           </a:prstGeom>
           <a:solidFill>
-            <a:srgbClr val="7A5C8E"/>
+            <a:srgbClr val="2E7D9A"/>
           </a:solidFill>
           <a:ln/>
         </p:spPr>
@@ -6095,7 +6095,7 @@
                 <a:ea typeface="Hanken Grotesk" pitchFamily="34" charset="-122"/>
                 <a:cs typeface="Hanken Grotesk" pitchFamily="34" charset="-120"/>
               </a:rPr>
-              <a:t>Our cost expression is 150 + 12s, where s is the number of speakers.</a:t>
+              <a:t>Agent Rivera has 3/4 pound and each portion is 1/8 pound. I want 3/4 ÷ 1/8.</a:t>
             </a:r>
             <a:endParaRPr lang="en-US" sz="1050" dirty="0"/>
           </a:p>
@@ -6116,7 +6116,7 @@
             <a:avLst/>
           </a:prstGeom>
           <a:solidFill>
-            <a:srgbClr val="7A5C8E"/>
+            <a:srgbClr val="2E7D9A"/>
           </a:solidFill>
           <a:ln/>
         </p:spPr>
@@ -6193,7 +6193,7 @@
                 <a:ea typeface="Hanken Grotesk" pitchFamily="34" charset="-122"/>
                 <a:cs typeface="Hanken Grotesk" pitchFamily="34" charset="-120"/>
               </a:rPr>
-              <a:t>I want the cost for s = 4 speakers.</a:t>
+              <a:t>Keep 3/4. Change ÷ to ×. Flip the divisor 1/8 to its reciprocal 8/1.</a:t>
             </a:r>
             <a:endParaRPr lang="en-US" sz="1050" dirty="0"/>
           </a:p>
@@ -6214,7 +6214,7 @@
             <a:avLst/>
           </a:prstGeom>
           <a:solidFill>
-            <a:srgbClr val="7A5C8E"/>
+            <a:srgbClr val="2E7D9A"/>
           </a:solidFill>
           <a:ln/>
         </p:spPr>
@@ -6291,7 +6291,7 @@
                 <a:ea typeface="Hanken Grotesk" pitchFamily="34" charset="-122"/>
                 <a:cs typeface="Hanken Grotesk" pitchFamily="34" charset="-120"/>
               </a:rPr>
-              <a:t>I replace s with 4: 150 + 12 × 4.</a:t>
+              <a:t>Multiply across: 3/4 × 8/1 = 24/4.</a:t>
             </a:r>
             <a:endParaRPr lang="en-US" sz="1050" dirty="0"/>
           </a:p>
@@ -6312,7 +6312,7 @@
             <a:avLst/>
           </a:prstGeom>
           <a:solidFill>
-            <a:srgbClr val="7A5C8E"/>
+            <a:srgbClr val="2E7D9A"/>
           </a:solidFill>
           <a:ln/>
         </p:spPr>
@@ -6389,7 +6389,7 @@
                 <a:ea typeface="Hanken Grotesk" pitchFamily="34" charset="-122"/>
                 <a:cs typeface="Hanken Grotesk" pitchFamily="34" charset="-120"/>
               </a:rPr>
-              <a:t>First I multiply: 12 × 4 = 48.</a:t>
+              <a:t>Simplify: 24/4 = 6. So 3/4 ÷ 1/8 = 6. She can make 6 portions.</a:t>
             </a:r>
             <a:endParaRPr lang="en-US" sz="1050" dirty="0"/>
           </a:p>
@@ -6398,104 +6398,6 @@
       <p:sp>
         <p:nvSpPr>
           <p:cNvPr id="31" name="Shape 29"/>
-          <p:cNvSpPr/>
-          <p:nvPr/>
-        </p:nvSpPr>
-        <p:spPr>
-          <a:xfrm>
-            <a:off x="594360" y="3145536"/>
-            <a:ext cx="274320" cy="274320"/>
-          </a:xfrm>
-          <a:prstGeom prst="ellipse">
-            <a:avLst/>
-          </a:prstGeom>
-          <a:solidFill>
-            <a:srgbClr val="7A5C8E"/>
-          </a:solidFill>
-          <a:ln/>
-        </p:spPr>
-      </p:sp>
-      <p:sp>
-        <p:nvSpPr>
-          <p:cNvPr id="32" name="Text 30"/>
-          <p:cNvSpPr/>
-          <p:nvPr/>
-        </p:nvSpPr>
-        <p:spPr>
-          <a:xfrm>
-            <a:off x="594360" y="3145536"/>
-            <a:ext cx="274320" cy="274320"/>
-          </a:xfrm>
-          <a:prstGeom prst="rect">
-            <a:avLst/>
-          </a:prstGeom>
-          <a:noFill/>
-          <a:ln/>
-        </p:spPr>
-        <p:txBody>
-          <a:bodyPr wrap="square" rtlCol="0" anchor="ctr"/>
-          <a:lstStyle/>
-          <a:p>
-            <a:pPr algn="ctr" indent="0" marL="0">
-              <a:buNone/>
-            </a:pPr>
-            <a:r>
-              <a:rPr lang="en-US" sz="1100" b="1" dirty="0">
-                <a:solidFill>
-                  <a:srgbClr val="FFFFFF"/>
-                </a:solidFill>
-                <a:latin typeface="Outfit" pitchFamily="34" charset="0"/>
-                <a:ea typeface="Outfit" pitchFamily="34" charset="-122"/>
-                <a:cs typeface="Outfit" pitchFamily="34" charset="-120"/>
-              </a:rPr>
-              <a:t>5</a:t>
-            </a:r>
-            <a:endParaRPr lang="en-US" sz="1100" dirty="0"/>
-          </a:p>
-        </p:txBody>
-      </p:sp>
-      <p:sp>
-        <p:nvSpPr>
-          <p:cNvPr id="33" name="Text 31"/>
-          <p:cNvSpPr/>
-          <p:nvPr/>
-        </p:nvSpPr>
-        <p:spPr>
-          <a:xfrm>
-            <a:off x="978408" y="3090672"/>
-            <a:ext cx="3456432" cy="420624"/>
-          </a:xfrm>
-          <a:prstGeom prst="rect">
-            <a:avLst/>
-          </a:prstGeom>
-          <a:noFill/>
-          <a:ln/>
-        </p:spPr>
-        <p:txBody>
-          <a:bodyPr wrap="square" rtlCol="0" anchor="ctr"/>
-          <a:lstStyle/>
-          <a:p>
-            <a:pPr indent="0" marL="0">
-              <a:buNone/>
-            </a:pPr>
-            <a:r>
-              <a:rPr lang="en-US" sz="1050" dirty="0">
-                <a:solidFill>
-                  <a:srgbClr val="24323F"/>
-                </a:solidFill>
-                <a:latin typeface="Hanken Grotesk" pitchFamily="34" charset="0"/>
-                <a:ea typeface="Hanken Grotesk" pitchFamily="34" charset="-122"/>
-                <a:cs typeface="Hanken Grotesk" pitchFamily="34" charset="-120"/>
-              </a:rPr>
-              <a:t>Then I add: 150 + 48 = 198. So 4 speakers cost $198.</a:t>
-            </a:r>
-            <a:endParaRPr lang="en-US" sz="1050" dirty="0"/>
-          </a:p>
-        </p:txBody>
-      </p:sp>
-      <p:sp>
-        <p:nvSpPr>
-          <p:cNvPr id="34" name="Shape 32"/>
           <p:cNvSpPr/>
           <p:nvPr/>
         </p:nvSpPr>
@@ -6529,7 +6431,7 @@
       </p:sp>
       <p:sp>
         <p:nvSpPr>
-          <p:cNvPr id="35" name="Text 33"/>
+          <p:cNvPr id="32" name="Text 30"/>
           <p:cNvSpPr/>
           <p:nvPr/>
         </p:nvSpPr>
@@ -6570,7 +6472,7 @@
       </p:sp>
       <p:sp>
         <p:nvSpPr>
-          <p:cNvPr id="36" name="Text 34"/>
+          <p:cNvPr id="33" name="Text 31"/>
           <p:cNvSpPr/>
           <p:nvPr/>
         </p:nvSpPr>
@@ -6609,7 +6511,7 @@
       </p:sp>
       <p:sp>
         <p:nvSpPr>
-          <p:cNvPr id="37" name="Shape 35"/>
+          <p:cNvPr id="34" name="Shape 32"/>
           <p:cNvSpPr/>
           <p:nvPr/>
         </p:nvSpPr>
@@ -6632,7 +6534,7 @@
       </p:sp>
       <p:sp>
         <p:nvSpPr>
-          <p:cNvPr id="38" name="Shape 36"/>
+          <p:cNvPr id="35" name="Shape 33"/>
           <p:cNvSpPr/>
           <p:nvPr/>
         </p:nvSpPr>
@@ -6655,7 +6557,7 @@
       </p:sp>
       <p:sp>
         <p:nvSpPr>
-          <p:cNvPr id="39" name="Shape 37"/>
+          <p:cNvPr id="36" name="Shape 34"/>
           <p:cNvSpPr/>
           <p:nvPr/>
         </p:nvSpPr>
@@ -6678,7 +6580,7 @@
       </p:sp>
       <p:sp>
         <p:nvSpPr>
-          <p:cNvPr id="40" name="Shape 38"/>
+          <p:cNvPr id="37" name="Shape 35"/>
           <p:cNvSpPr/>
           <p:nvPr/>
         </p:nvSpPr>
@@ -6701,7 +6603,7 @@
       </p:sp>
       <p:sp>
         <p:nvSpPr>
-          <p:cNvPr id="41" name="Shape 39"/>
+          <p:cNvPr id="38" name="Shape 36"/>
           <p:cNvSpPr/>
           <p:nvPr/>
         </p:nvSpPr>
@@ -6724,7 +6626,7 @@
       </p:sp>
       <p:sp>
         <p:nvSpPr>
-          <p:cNvPr id="42" name="Shape 40"/>
+          <p:cNvPr id="39" name="Shape 37"/>
           <p:cNvSpPr/>
           <p:nvPr/>
         </p:nvSpPr>
@@ -6747,7 +6649,7 @@
       </p:sp>
       <p:sp>
         <p:nvSpPr>
-          <p:cNvPr id="43" name="Shape 41"/>
+          <p:cNvPr id="40" name="Shape 38"/>
           <p:cNvSpPr/>
           <p:nvPr/>
         </p:nvSpPr>
@@ -6770,7 +6672,7 @@
       </p:sp>
       <p:sp>
         <p:nvSpPr>
-          <p:cNvPr id="44" name="Shape 42"/>
+          <p:cNvPr id="41" name="Shape 39"/>
           <p:cNvSpPr/>
           <p:nvPr/>
         </p:nvSpPr>
@@ -6938,7 +6840,7 @@
             </a:avLst>
           </a:prstGeom>
           <a:solidFill>
-            <a:srgbClr val="7A5C8E"/>
+            <a:srgbClr val="2E7D9A"/>
           </a:solidFill>
           <a:ln/>
         </p:spPr>
@@ -6958,7 +6860,7 @@
                 <a:ea typeface="Outfit" pitchFamily="34" charset="-122"/>
                 <a:cs typeface="Outfit" pitchFamily="34" charset="-120"/>
               </a:rPr>
-              <a:t>6.AT.6c</a:t>
+              <a:t>6.NOS.1</a:t>
             </a:r>
             <a:endParaRPr lang="en-US" sz="900" dirty="0"/>
           </a:p>
@@ -7177,7 +7079,7 @@
                 <a:ea typeface="Hanken Grotesk" pitchFamily="34" charset="-122"/>
                 <a:cs typeface="Hanken Grotesk" pitchFamily="34" charset="-120"/>
               </a:rPr>
-              <a:t>Reveal Math Grade 6  ·  Unit 6  ·  Lesson 6-2</a:t>
+              <a:t>Reveal Math Grade 6  ·  Unit 2  ·  Lesson 2-3</a:t>
             </a:r>
             <a:endParaRPr lang="en-US" sz="750" dirty="0"/>
           </a:p>
@@ -7403,7 +7305,7 @@
                 <a:ea typeface="Hanken Grotesk" pitchFamily="34" charset="-122"/>
                 <a:cs typeface="Hanken Grotesk" pitchFamily="34" charset="-120"/>
               </a:rPr>
-              <a:t>Sketch a model for today's problem. Label it using Variable and Expression.</a:t>
+              <a:t>Sketch a model for today's problem. Label it using Dividend and Divisor.</a:t>
             </a:r>
             <a:endParaRPr lang="en-US" sz="1000" dirty="0"/>
           </a:p>
@@ -7551,7 +7453,7 @@
                 <a:ea typeface="Hanken Grotesk" pitchFamily="34" charset="-122"/>
                 <a:cs typeface="Hanken Grotesk" pitchFamily="34" charset="-120"/>
               </a:rPr>
-              <a:t>In 2–3 sentences, explain "Replace the variable with its number, then follow the order of operations to find the total." in your own words.</a:t>
+              <a:t>In 2–3 sentences, explain "To divide fractions, multiply the first fraction by the reciprocal of the second, then simplify the answer." in your own words.</a:t>
             </a:r>
             <a:endParaRPr lang="en-US" sz="1000" dirty="0"/>
           </a:p>
@@ -7847,7 +7749,7 @@
                 <a:ea typeface="Hanken Grotesk" pitchFamily="34" charset="-122"/>
                 <a:cs typeface="Hanken Grotesk" pitchFamily="34" charset="-120"/>
               </a:rPr>
-              <a:t>Write your own problem that uses Variable, then solve it and make an answer key.</a:t>
+              <a:t>Write your own problem that uses Dividend, then solve it and make an answer key.</a:t>
             </a:r>
             <a:endParaRPr lang="en-US" sz="1000" dirty="0"/>
           </a:p>
@@ -8000,7 +7902,7 @@
             </a:avLst>
           </a:prstGeom>
           <a:solidFill>
-            <a:srgbClr val="7A5C8E"/>
+            <a:srgbClr val="2E7D9A"/>
           </a:solidFill>
           <a:ln/>
         </p:spPr>
@@ -8020,7 +7922,7 @@
                 <a:ea typeface="Outfit" pitchFamily="34" charset="-122"/>
                 <a:cs typeface="Outfit" pitchFamily="34" charset="-120"/>
               </a:rPr>
-              <a:t>6.AT.6c</a:t>
+              <a:t>6.NOS.1</a:t>
             </a:r>
             <a:endParaRPr lang="en-US" sz="900" dirty="0"/>
           </a:p>
@@ -8239,7 +8141,7 @@
                 <a:ea typeface="Hanken Grotesk" pitchFamily="34" charset="-122"/>
                 <a:cs typeface="Hanken Grotesk" pitchFamily="34" charset="-120"/>
               </a:rPr>
-              <a:t>Reveal Math Grade 6  ·  Unit 6  ·  Lesson 6-2</a:t>
+              <a:t>Reveal Math Grade 6  ·  Unit 2  ·  Lesson 2-3</a:t>
             </a:r>
             <a:endParaRPr lang="en-US" sz="750" dirty="0"/>
           </a:p>
@@ -8335,7 +8237,7 @@
             </a:avLst>
           </a:prstGeom>
           <a:solidFill>
-            <a:srgbClr val="7A5C8E"/>
+            <a:srgbClr val="2E7D9A"/>
           </a:solidFill>
           <a:ln/>
         </p:spPr>
@@ -8388,7 +8290,7 @@
             <a:r>
               <a:rPr lang="en-US" sz="1050" b="1" dirty="0">
                 <a:solidFill>
-                  <a:srgbClr val="7A5C8E"/>
+                  <a:srgbClr val="2E7D9A"/>
                 </a:solidFill>
                 <a:latin typeface="Hanken Grotesk" pitchFamily="34" charset="0"/>
                 <a:ea typeface="Hanken Grotesk" pitchFamily="34" charset="-122"/>
@@ -8408,7 +8310,7 @@
                 <a:ea typeface="Hanken Grotesk" pitchFamily="34" charset="-122"/>
                 <a:cs typeface="Hanken Grotesk" pitchFamily="34" charset="-120"/>
               </a:rPr>
-              <a:t>Evaluate 3x + 7 when x = 4.</a:t>
+              <a:t>A recipe needs 2/3 cup of sugar. You only have a 1/6-cup scoop. How many scoops do you need?</a:t>
             </a:r>
             <a:endParaRPr lang="en-US" sz="1050" dirty="0"/>
           </a:p>
@@ -8464,7 +8366,7 @@
             <a:r>
               <a:rPr lang="en-US" sz="1050" b="1" dirty="0">
                 <a:solidFill>
-                  <a:srgbClr val="7A5C8E"/>
+                  <a:srgbClr val="2E7D9A"/>
                 </a:solidFill>
                 <a:latin typeface="Hanken Grotesk" pitchFamily="34" charset="0"/>
                 <a:ea typeface="Hanken Grotesk" pitchFamily="34" charset="-122"/>
@@ -8484,7 +8386,7 @@
                 <a:ea typeface="Hanken Grotesk" pitchFamily="34" charset="-122"/>
                 <a:cs typeface="Hanken Grotesk" pitchFamily="34" charset="-120"/>
               </a:rPr>
-              <a:t>Evaluate 20 − 2n when n = 6.</a:t>
+              <a:t>What is the reciprocal of 3/5?</a:t>
             </a:r>
             <a:endParaRPr lang="en-US" sz="1050" dirty="0"/>
           </a:p>
@@ -8540,7 +8442,7 @@
             <a:r>
               <a:rPr lang="en-US" sz="1050" b="1" dirty="0">
                 <a:solidFill>
-                  <a:srgbClr val="7A5C8E"/>
+                  <a:srgbClr val="2E7D9A"/>
                 </a:solidFill>
                 <a:latin typeface="Hanken Grotesk" pitchFamily="34" charset="0"/>
                 <a:ea typeface="Hanken Grotesk" pitchFamily="34" charset="-122"/>
@@ -8560,7 +8462,7 @@
                 <a:ea typeface="Hanken Grotesk" pitchFamily="34" charset="-122"/>
                 <a:cs typeface="Hanken Grotesk" pitchFamily="34" charset="-120"/>
               </a:rPr>
-              <a:t>Which expression means '5 less than twice a number n'?</a:t>
+              <a:t>What is 1/2 ÷ 1/4?</a:t>
             </a:r>
             <a:endParaRPr lang="en-US" sz="1050" dirty="0"/>
           </a:p>
@@ -8697,7 +8599,7 @@
                 <a:ea typeface="Hanken Grotesk" pitchFamily="34" charset="-122"/>
                 <a:cs typeface="Hanken Grotesk" pitchFamily="34" charset="-120"/>
               </a:rPr>
-              <a:t>The rideshare fare is 2.50 + 1.75m for m miles. How much is an 8-mile ride, and what does each part of the expression represent?</a:t>
+              <a:t>How could dividing fractions help you share food or materials fairly?</a:t>
             </a:r>
             <a:endParaRPr lang="en-US" sz="1000" dirty="0"/>
           </a:p>
@@ -8965,7 +8867,7 @@
             </a:avLst>
           </a:prstGeom>
           <a:solidFill>
-            <a:srgbClr val="7A5C8E"/>
+            <a:srgbClr val="2E7D9A"/>
           </a:solidFill>
           <a:ln/>
         </p:spPr>
@@ -8985,7 +8887,7 @@
                 <a:ea typeface="Outfit" pitchFamily="34" charset="-122"/>
                 <a:cs typeface="Outfit" pitchFamily="34" charset="-120"/>
               </a:rPr>
-              <a:t>6.AT.6c</a:t>
+              <a:t>6.NOS.1</a:t>
             </a:r>
             <a:endParaRPr lang="en-US" sz="900" dirty="0"/>
           </a:p>
@@ -9204,7 +9106,7 @@
                 <a:ea typeface="Hanken Grotesk" pitchFamily="34" charset="-122"/>
                 <a:cs typeface="Hanken Grotesk" pitchFamily="34" charset="-120"/>
               </a:rPr>
-              <a:t>Reveal Math Grade 6  ·  Unit 6  ·  Lesson 6-2</a:t>
+              <a:t>Reveal Math Grade 6  ·  Unit 2  ·  Lesson 2-3</a:t>
             </a:r>
             <a:endParaRPr lang="en-US" sz="750" dirty="0"/>
           </a:p>
@@ -9363,7 +9265,7 @@
             <a:r>
               <a:rPr lang="en-US" sz="1100" b="1" dirty="0">
                 <a:solidFill>
-                  <a:srgbClr val="7A5C8E"/>
+                  <a:srgbClr val="2E7D9A"/>
                 </a:solidFill>
                 <a:latin typeface="Outfit" pitchFamily="34" charset="0"/>
                 <a:ea typeface="Outfit" pitchFamily="34" charset="-122"/>
@@ -9408,7 +9310,7 @@
                 <a:ea typeface="Hanken Grotesk" pitchFamily="34" charset="-122"/>
                 <a:cs typeface="Hanken Grotesk" pitchFamily="34" charset="-120"/>
               </a:rPr>
-              <a:t>Today's key idea is "Replace the variable with its number, then follow the order of operations to find the total." — and it works because ___.</a:t>
+              <a:t>Today's key idea is "To divide fractions, multiply the first fraction by the reciprocal of the second, then simplify the answer." — and it works because ___.</a:t>
             </a:r>
             <a:endParaRPr lang="en-US" sz="1050" dirty="0"/>
           </a:p>
@@ -9512,7 +9414,7 @@
             <a:r>
               <a:rPr lang="en-US" sz="1100" b="1" dirty="0">
                 <a:solidFill>
-                  <a:srgbClr val="7A5C8E"/>
+                  <a:srgbClr val="2E7D9A"/>
                 </a:solidFill>
                 <a:latin typeface="Outfit" pitchFamily="34" charset="0"/>
                 <a:ea typeface="Outfit" pitchFamily="34" charset="-122"/>
@@ -9557,7 +9459,7 @@
                 <a:ea typeface="Hanken Grotesk" pitchFamily="34" charset="-122"/>
                 <a:cs typeface="Hanken Grotesk" pitchFamily="34" charset="-120"/>
               </a:rPr>
-              <a:t>Because Variable means ___, but a tricky part is ___, so I have to ___.</a:t>
+              <a:t>Because Dividend means ___, but a tricky part is ___, so I have to ___.</a:t>
             </a:r>
             <a:endParaRPr lang="en-US" sz="1050" dirty="0"/>
           </a:p>
@@ -9661,7 +9563,7 @@
             <a:r>
               <a:rPr lang="en-US" sz="1100" b="1" dirty="0">
                 <a:solidFill>
-                  <a:srgbClr val="7A5C8E"/>
+                  <a:srgbClr val="2E7D9A"/>
                 </a:solidFill>
                 <a:latin typeface="Outfit" pitchFamily="34" charset="0"/>
                 <a:ea typeface="Outfit" pitchFamily="34" charset="-122"/>
@@ -9706,7 +9608,7 @@
                 <a:ea typeface="Hanken Grotesk" pitchFamily="34" charset="-122"/>
                 <a:cs typeface="Hanken Grotesk" pitchFamily="34" charset="-120"/>
               </a:rPr>
-              <a:t>A common mistake with Variable is ___. It happens because ___, and the fix is ___.</a:t>
+              <a:t>A common mistake with Dividend is ___. It happens because ___, and the fix is ___.</a:t>
             </a:r>
             <a:endParaRPr lang="en-US" sz="1050" dirty="0"/>
           </a:p>
@@ -9882,7 +9784,7 @@
             </a:avLst>
           </a:prstGeom>
           <a:solidFill>
-            <a:srgbClr val="7A5C8E"/>
+            <a:srgbClr val="2E7D9A"/>
           </a:solidFill>
           <a:ln/>
         </p:spPr>
@@ -9902,7 +9804,7 @@
                 <a:ea typeface="Outfit" pitchFamily="34" charset="-122"/>
                 <a:cs typeface="Outfit" pitchFamily="34" charset="-120"/>
               </a:rPr>
-              <a:t>6.AT.6c</a:t>
+              <a:t>6.NOS.1</a:t>
             </a:r>
             <a:endParaRPr lang="en-US" sz="900" dirty="0"/>
           </a:p>
@@ -10121,7 +10023,7 @@
                 <a:ea typeface="Hanken Grotesk" pitchFamily="34" charset="-122"/>
                 <a:cs typeface="Hanken Grotesk" pitchFamily="34" charset="-120"/>
               </a:rPr>
-              <a:t>Reveal Math Grade 6  ·  Unit 6  ·  Lesson 6-2</a:t>
+              <a:t>Reveal Math Grade 6  ·  Unit 2  ·  Lesson 2-3</a:t>
             </a:r>
             <a:endParaRPr lang="en-US" sz="750" dirty="0"/>
           </a:p>
@@ -10559,7 +10461,7 @@
             <a:r>
               <a:rPr lang="en-US" sz="1050" b="1" dirty="0">
                 <a:solidFill>
-                  <a:srgbClr val="7A5C8E"/>
+                  <a:srgbClr val="2E7D9A"/>
                 </a:solidFill>
                 <a:latin typeface="Hanken Grotesk" pitchFamily="34" charset="0"/>
                 <a:ea typeface="Hanken Grotesk" pitchFamily="34" charset="-122"/>
@@ -10579,7 +10481,7 @@
                 <a:ea typeface="Hanken Grotesk" pitchFamily="34" charset="-122"/>
                 <a:cs typeface="Hanken Grotesk" pitchFamily="34" charset="-120"/>
               </a:rPr>
-              <a:t>Evaluate 5(n − 3) + 2 when n = 7.</a:t>
+              <a:t>What is 4/5 ÷ 2/5?</a:t>
             </a:r>
             <a:endParaRPr lang="en-US" sz="1050" dirty="0"/>
           </a:p>
@@ -10618,7 +10520,7 @@
                 <a:ea typeface="Hanken Grotesk" pitchFamily="34" charset="-122"/>
                 <a:cs typeface="Hanken Grotesk" pitchFamily="34" charset="-120"/>
               </a:rPr>
-              <a:t>A.  22</a:t>
+              <a:t>A.  2</a:t>
             </a:r>
             <a:endParaRPr lang="en-US" sz="1000" dirty="0"/>
           </a:p>
@@ -10657,7 +10559,7 @@
                 <a:ea typeface="Hanken Grotesk" pitchFamily="34" charset="-122"/>
                 <a:cs typeface="Hanken Grotesk" pitchFamily="34" charset="-120"/>
               </a:rPr>
-              <a:t>B.  34</a:t>
+              <a:t>B.  8/25</a:t>
             </a:r>
             <a:endParaRPr lang="en-US" sz="1000" dirty="0"/>
           </a:p>
@@ -10696,7 +10598,7 @@
                 <a:ea typeface="Hanken Grotesk" pitchFamily="34" charset="-122"/>
                 <a:cs typeface="Hanken Grotesk" pitchFamily="34" charset="-120"/>
               </a:rPr>
-              <a:t>C.  20</a:t>
+              <a:t>C.  2/5</a:t>
             </a:r>
             <a:endParaRPr lang="en-US" sz="1000" dirty="0"/>
           </a:p>
@@ -10735,7 +10637,7 @@
                 <a:ea typeface="Hanken Grotesk" pitchFamily="34" charset="-122"/>
                 <a:cs typeface="Hanken Grotesk" pitchFamily="34" charset="-120"/>
               </a:rPr>
-              <a:t>D.  18</a:t>
+              <a:t>D.  10/5</a:t>
             </a:r>
             <a:endParaRPr lang="en-US" sz="1000" dirty="0"/>
           </a:p>
@@ -10768,7 +10670,7 @@
             <a:r>
               <a:rPr lang="en-US" sz="1050" b="1" dirty="0">
                 <a:solidFill>
-                  <a:srgbClr val="7A5C8E"/>
+                  <a:srgbClr val="2E7D9A"/>
                 </a:solidFill>
                 <a:latin typeface="Hanken Grotesk" pitchFamily="34" charset="0"/>
                 <a:ea typeface="Hanken Grotesk" pitchFamily="34" charset="-122"/>
@@ -11010,7 +10912,7 @@
             </a:avLst>
           </a:prstGeom>
           <a:solidFill>
-            <a:srgbClr val="7A5C8E"/>
+            <a:srgbClr val="2E7D9A"/>
           </a:solidFill>
           <a:ln/>
         </p:spPr>
@@ -11030,7 +10932,7 @@
                 <a:ea typeface="Outfit" pitchFamily="34" charset="-122"/>
                 <a:cs typeface="Outfit" pitchFamily="34" charset="-120"/>
               </a:rPr>
-              <a:t>6.AT.6c</a:t>
+              <a:t>6.NOS.1</a:t>
             </a:r>
             <a:endParaRPr lang="en-US" sz="900" dirty="0"/>
           </a:p>
@@ -11249,7 +11151,7 @@
                 <a:ea typeface="Hanken Grotesk" pitchFamily="34" charset="-122"/>
                 <a:cs typeface="Hanken Grotesk" pitchFamily="34" charset="-120"/>
               </a:rPr>
-              <a:t>Reveal Math Grade 6  ·  Unit 6  ·  Lesson 6-2</a:t>
+              <a:t>Reveal Math Grade 6  ·  Unit 2  ·  Lesson 2-3</a:t>
             </a:r>
             <a:endParaRPr lang="en-US" sz="750" dirty="0"/>
           </a:p>
@@ -11363,7 +11265,7 @@
                 <a:ea typeface="Hanken Grotesk" pitchFamily="34" charset="-122"/>
                 <a:cs typeface="Hanken Grotesk" pitchFamily="34" charset="-120"/>
               </a:rPr>
-              <a:t>I can evaluate algebraic expressions by substituting values for the variables.</a:t>
+              <a:t>I can divide a fraction by a fraction by multiplying by the reciprocal and simplifying.</a:t>
             </a:r>
             <a:endParaRPr lang="en-US" sz="1100" dirty="0"/>
           </a:p>
@@ -11418,7 +11320,7 @@
             <a:avLst/>
           </a:prstGeom>
           <a:solidFill>
-            <a:srgbClr val="7A5C8E"/>
+            <a:srgbClr val="2E7D9A"/>
           </a:solidFill>
           <a:ln/>
         </p:spPr>
@@ -11628,7 +11530,7 @@
             <a:avLst/>
           </a:prstGeom>
           <a:solidFill>
-            <a:srgbClr val="7A5C8E"/>
+            <a:srgbClr val="2E7D9A"/>
           </a:solidFill>
           <a:ln/>
         </p:spPr>
@@ -11838,7 +11740,7 @@
             <a:avLst/>
           </a:prstGeom>
           <a:solidFill>
-            <a:srgbClr val="7A5C8E"/>
+            <a:srgbClr val="2E7D9A"/>
           </a:solidFill>
           <a:ln/>
         </p:spPr>
@@ -12048,7 +11950,7 @@
             <a:avLst/>
           </a:prstGeom>
           <a:solidFill>
-            <a:srgbClr val="7A5C8E"/>
+            <a:srgbClr val="2E7D9A"/>
           </a:solidFill>
           <a:ln/>
         </p:spPr>
@@ -12270,7 +12172,7 @@
             <a:r>
               <a:rPr lang="en-US" sz="1050" b="1" dirty="0">
                 <a:solidFill>
-                  <a:srgbClr val="7A5C8E"/>
+                  <a:srgbClr val="2E7D9A"/>
                 </a:solidFill>
                 <a:latin typeface="Hanken Grotesk" pitchFamily="34" charset="0"/>
                 <a:ea typeface="Hanken Grotesk" pitchFamily="34" charset="-122"/>
@@ -12443,7 +12345,7 @@
             </a:avLst>
           </a:prstGeom>
           <a:solidFill>
-            <a:srgbClr val="7A5C8E"/>
+            <a:srgbClr val="2E7D9A"/>
           </a:solidFill>
           <a:ln/>
         </p:spPr>
@@ -12463,7 +12365,7 @@
                 <a:ea typeface="Outfit" pitchFamily="34" charset="-122"/>
                 <a:cs typeface="Outfit" pitchFamily="34" charset="-120"/>
               </a:rPr>
-              <a:t>6.AT.6c</a:t>
+              <a:t>6.NOS.1</a:t>
             </a:r>
             <a:endParaRPr lang="en-US" sz="900" dirty="0"/>
           </a:p>
@@ -12682,7 +12584,7 @@
                 <a:ea typeface="Hanken Grotesk" pitchFamily="34" charset="-122"/>
                 <a:cs typeface="Hanken Grotesk" pitchFamily="34" charset="-120"/>
               </a:rPr>
-              <a:t>Reveal Math Grade 6  ·  Unit 6  ·  Lesson 6-2</a:t>
+              <a:t>Reveal Math Grade 6  ·  Unit 2  ·  Lesson 2-3</a:t>
             </a:r>
             <a:endParaRPr lang="en-US" sz="750" dirty="0"/>
           </a:p>
@@ -12817,7 +12719,7 @@
             </a:avLst>
           </a:prstGeom>
           <a:solidFill>
-            <a:srgbClr val="7A5C8E"/>
+            <a:srgbClr val="2E7D9A"/>
           </a:solidFill>
           <a:ln/>
         </p:spPr>
@@ -12870,7 +12772,7 @@
             <a:r>
               <a:rPr lang="en-US" sz="1300" b="1" dirty="0">
                 <a:solidFill>
-                  <a:srgbClr val="7A5C8E"/>
+                  <a:srgbClr val="2E7D9A"/>
                 </a:solidFill>
                 <a:latin typeface="Outfit" pitchFamily="34" charset="0"/>
                 <a:ea typeface="Outfit" pitchFamily="34" charset="-122"/>
@@ -12932,7 +12834,7 @@
                 <a:ea typeface="Hanken Grotesk" pitchFamily="34" charset="-122"/>
                 <a:cs typeface="Hanken Grotesk" pitchFamily="34" charset="-120"/>
               </a:rPr>
-              <a:t>I can evaluate algebraic expressions by substituting values for the variables.</a:t>
+              <a:t>I can divide a fraction by a fraction by multiplying by the reciprocal and simplifying.</a:t>
             </a:r>
             <a:endParaRPr lang="en-US" sz="1800" dirty="0"/>
           </a:p>
@@ -12989,7 +12891,7 @@
             </a:avLst>
           </a:prstGeom>
           <a:solidFill>
-            <a:srgbClr val="7A5C8E"/>
+            <a:srgbClr val="2E7D9A"/>
           </a:solidFill>
           <a:ln/>
         </p:spPr>
@@ -13042,7 +12944,7 @@
             <a:r>
               <a:rPr lang="en-US" sz="1300" b="1" dirty="0">
                 <a:solidFill>
-                  <a:srgbClr val="7A5C8E"/>
+                  <a:srgbClr val="2E7D9A"/>
                 </a:solidFill>
                 <a:latin typeface="Outfit" pitchFamily="34" charset="0"/>
                 <a:ea typeface="Outfit" pitchFamily="34" charset="-122"/>
@@ -13104,7 +13006,7 @@
                 <a:ea typeface="Hanken Grotesk" pitchFamily="34" charset="-122"/>
                 <a:cs typeface="Hanken Grotesk" pitchFamily="34" charset="-120"/>
               </a:rPr>
-              <a:t>I can explain my steps using the words variable, expression, evaluate, and substitute.</a:t>
+              <a:t>I can explain my steps using the words dividend, divisor, reciprocal, quotient, and simplify.</a:t>
             </a:r>
             <a:endParaRPr lang="en-US" sz="1700" dirty="0"/>
           </a:p>
@@ -13257,7 +13159,7 @@
             </a:avLst>
           </a:prstGeom>
           <a:solidFill>
-            <a:srgbClr val="7A5C8E"/>
+            <a:srgbClr val="2E7D9A"/>
           </a:solidFill>
           <a:ln/>
         </p:spPr>
@@ -13277,7 +13179,7 @@
                 <a:ea typeface="Outfit" pitchFamily="34" charset="-122"/>
                 <a:cs typeface="Outfit" pitchFamily="34" charset="-120"/>
               </a:rPr>
-              <a:t>6.AT.6c</a:t>
+              <a:t>6.NOS.1</a:t>
             </a:r>
             <a:endParaRPr lang="en-US" sz="900" dirty="0"/>
           </a:p>
@@ -13496,7 +13398,7 @@
                 <a:ea typeface="Hanken Grotesk" pitchFamily="34" charset="-122"/>
                 <a:cs typeface="Hanken Grotesk" pitchFamily="34" charset="-120"/>
               </a:rPr>
-              <a:t>Reveal Math Grade 6  ·  Unit 6  ·  Lesson 6-2</a:t>
+              <a:t>Reveal Math Grade 6  ·  Unit 2  ·  Lesson 2-3</a:t>
             </a:r>
             <a:endParaRPr lang="en-US" sz="750" dirty="0"/>
           </a:p>
@@ -13592,7 +13494,7 @@
             </a:avLst>
           </a:prstGeom>
           <a:solidFill>
-            <a:srgbClr val="7A5C8E"/>
+            <a:srgbClr val="2E7D9A"/>
           </a:solidFill>
           <a:ln/>
         </p:spPr>
@@ -13693,7 +13595,7 @@
                 <a:ea typeface="Hanken Grotesk" pitchFamily="34" charset="-122"/>
                 <a:cs typeface="Hanken Grotesk" pitchFamily="34" charset="-120"/>
               </a:rPr>
-              <a:t>The concert cost is 150 + 12s, where s is the number of speakers. How do you find the cost for 5 speakers, and why does this one expression work for any number of speakers?</a:t>
+              <a:t>Agent Rivera splits a 3/4-pound evidence bag into 1/8-pound portions. Will she get more or fewer than 1 portion? Estimate before solving.</a:t>
             </a:r>
             <a:endParaRPr lang="en-US" sz="1400" dirty="0"/>
           </a:p>
@@ -14023,7 +13925,7 @@
                 <a:ea typeface="Hanken Grotesk" pitchFamily="34" charset="-122"/>
                 <a:cs typeface="Hanken Grotesk" pitchFamily="34" charset="-120"/>
               </a:rPr>
-              <a:t>Variable</a:t>
+              <a:t>dividend</a:t>
             </a:r>
             <a:endParaRPr lang="en-US" sz="900" dirty="0"/>
           </a:p>
@@ -14070,7 +13972,7 @@
                 <a:ea typeface="Hanken Grotesk" pitchFamily="34" charset="-122"/>
                 <a:cs typeface="Hanken Grotesk" pitchFamily="34" charset="-120"/>
               </a:rPr>
-              <a:t>Expression</a:t>
+              <a:t>divisor</a:t>
             </a:r>
             <a:endParaRPr lang="en-US" sz="900" dirty="0"/>
           </a:p>
@@ -14117,54 +14019,7 @@
                 <a:ea typeface="Hanken Grotesk" pitchFamily="34" charset="-122"/>
                 <a:cs typeface="Hanken Grotesk" pitchFamily="34" charset="-120"/>
               </a:rPr>
-              <a:t>Evaluate</a:t>
-            </a:r>
-            <a:endParaRPr lang="en-US" sz="900" dirty="0"/>
-          </a:p>
-        </p:txBody>
-      </p:sp>
-      <p:sp>
-        <p:nvSpPr>
-          <p:cNvPr id="31" name="Text 29"/>
-          <p:cNvSpPr/>
-          <p:nvPr/>
-        </p:nvSpPr>
-        <p:spPr>
-          <a:xfrm>
-            <a:off x="7520940" y="3227832"/>
-            <a:ext cx="1120140" cy="329184"/>
-          </a:xfrm>
-          <a:prstGeom prst="roundRect">
-            <a:avLst>
-              <a:gd name="adj" fmla="val 13889"/>
-            </a:avLst>
-          </a:prstGeom>
-          <a:solidFill>
-            <a:srgbClr val="FFFFFF"/>
-          </a:solidFill>
-          <a:ln w="12700">
-            <a:solidFill>
-              <a:srgbClr val="D6DBDF"/>
-            </a:solidFill>
-          </a:ln>
-        </p:spPr>
-        <p:txBody>
-          <a:bodyPr wrap="square" rtlCol="0" anchor="ctr"/>
-          <a:lstStyle/>
-          <a:p>
-            <a:pPr algn="ctr" indent="0" marL="0">
-              <a:buNone/>
-            </a:pPr>
-            <a:r>
-              <a:rPr lang="en-US" sz="900" b="1" dirty="0">
-                <a:solidFill>
-                  <a:srgbClr val="17324D"/>
-                </a:solidFill>
-                <a:latin typeface="Hanken Grotesk" pitchFamily="34" charset="0"/>
-                <a:ea typeface="Hanken Grotesk" pitchFamily="34" charset="-122"/>
-                <a:cs typeface="Hanken Grotesk" pitchFamily="34" charset="-120"/>
-              </a:rPr>
-              <a:t>Substitute</a:t>
+              <a:t>quotient</a:t>
             </a:r>
             <a:endParaRPr lang="en-US" sz="900" dirty="0"/>
           </a:p>
@@ -14317,7 +14172,7 @@
             </a:avLst>
           </a:prstGeom>
           <a:solidFill>
-            <a:srgbClr val="7A5C8E"/>
+            <a:srgbClr val="2E7D9A"/>
           </a:solidFill>
           <a:ln/>
         </p:spPr>
@@ -14337,7 +14192,7 @@
                 <a:ea typeface="Outfit" pitchFamily="34" charset="-122"/>
                 <a:cs typeface="Outfit" pitchFamily="34" charset="-120"/>
               </a:rPr>
-              <a:t>6.AT.6c</a:t>
+              <a:t>6.NOS.1</a:t>
             </a:r>
             <a:endParaRPr lang="en-US" sz="900" dirty="0"/>
           </a:p>
@@ -14556,7 +14411,7 @@
                 <a:ea typeface="Hanken Grotesk" pitchFamily="34" charset="-122"/>
                 <a:cs typeface="Hanken Grotesk" pitchFamily="34" charset="-120"/>
               </a:rPr>
-              <a:t>Reveal Math Grade 6  ·  Unit 6  ·  Lesson 6-2</a:t>
+              <a:t>Reveal Math Grade 6  ·  Unit 2  ·  Lesson 2-3</a:t>
             </a:r>
             <a:endParaRPr lang="en-US" sz="750" dirty="0"/>
           </a:p>
@@ -14652,7 +14507,7 @@
             </a:avLst>
           </a:prstGeom>
           <a:solidFill>
-            <a:srgbClr val="7A5C8E"/>
+            <a:srgbClr val="2E7D9A"/>
           </a:solidFill>
           <a:ln/>
         </p:spPr>
@@ -14753,7 +14608,7 @@
                 <a:ea typeface="Hanken Grotesk" pitchFamily="34" charset="-122"/>
                 <a:cs typeface="Hanken Grotesk" pitchFamily="34" charset="-120"/>
               </a:rPr>
-              <a:t>When you evaluate an expression like 4x² + 3, what order do you follow, and why must you square before you multiply?</a:t>
+              <a:t>Why do we multiply by the reciprocal when we divide one fraction by another?</a:t>
             </a:r>
             <a:endParaRPr lang="en-US" sz="1400" dirty="0"/>
           </a:p>
@@ -15083,7 +14938,7 @@
                 <a:ea typeface="Hanken Grotesk" pitchFamily="34" charset="-122"/>
                 <a:cs typeface="Hanken Grotesk" pitchFamily="34" charset="-120"/>
               </a:rPr>
-              <a:t>Evaluate</a:t>
+              <a:t>reciprocal</a:t>
             </a:r>
             <a:endParaRPr lang="en-US" sz="900" dirty="0"/>
           </a:p>
@@ -15130,7 +14985,7 @@
                 <a:ea typeface="Hanken Grotesk" pitchFamily="34" charset="-122"/>
                 <a:cs typeface="Hanken Grotesk" pitchFamily="34" charset="-120"/>
               </a:rPr>
-              <a:t>Substitute</a:t>
+              <a:t>divisor</a:t>
             </a:r>
             <a:endParaRPr lang="en-US" sz="900" dirty="0"/>
           </a:p>
@@ -15177,7 +15032,7 @@
                 <a:ea typeface="Hanken Grotesk" pitchFamily="34" charset="-122"/>
                 <a:cs typeface="Hanken Grotesk" pitchFamily="34" charset="-120"/>
               </a:rPr>
-              <a:t>Expression</a:t>
+              <a:t>quotient</a:t>
             </a:r>
             <a:endParaRPr lang="en-US" sz="900" dirty="0"/>
           </a:p>
@@ -15224,7 +15079,7 @@
                 <a:ea typeface="Hanken Grotesk" pitchFamily="34" charset="-122"/>
                 <a:cs typeface="Hanken Grotesk" pitchFamily="34" charset="-120"/>
               </a:rPr>
-              <a:t>Variable</a:t>
+              <a:t>simplify</a:t>
             </a:r>
             <a:endParaRPr lang="en-US" sz="900" dirty="0"/>
           </a:p>
@@ -15377,7 +15232,7 @@
             </a:avLst>
           </a:prstGeom>
           <a:solidFill>
-            <a:srgbClr val="7A5C8E"/>
+            <a:srgbClr val="2E7D9A"/>
           </a:solidFill>
           <a:ln/>
         </p:spPr>
@@ -15397,7 +15252,7 @@
                 <a:ea typeface="Outfit" pitchFamily="34" charset="-122"/>
                 <a:cs typeface="Outfit" pitchFamily="34" charset="-120"/>
               </a:rPr>
-              <a:t>6.AT.6c</a:t>
+              <a:t>6.NOS.1</a:t>
             </a:r>
             <a:endParaRPr lang="en-US" sz="900" dirty="0"/>
           </a:p>
@@ -15616,7 +15471,7 @@
                 <a:ea typeface="Hanken Grotesk" pitchFamily="34" charset="-122"/>
                 <a:cs typeface="Hanken Grotesk" pitchFamily="34" charset="-120"/>
               </a:rPr>
-              <a:t>Reveal Math Grade 6  ·  Unit 6  ·  Lesson 6-2</a:t>
+              <a:t>Reveal Math Grade 6  ·  Unit 2  ·  Lesson 2-3</a:t>
             </a:r>
             <a:endParaRPr lang="en-US" sz="750" dirty="0"/>
           </a:p>
@@ -15712,7 +15567,7 @@
             </a:avLst>
           </a:prstGeom>
           <a:solidFill>
-            <a:srgbClr val="7A5C8E"/>
+            <a:srgbClr val="2E7D9A"/>
           </a:solidFill>
           <a:ln/>
         </p:spPr>
@@ -15813,7 +15668,7 @@
                 <a:ea typeface="Hanken Grotesk" pitchFamily="34" charset="-122"/>
                 <a:cs typeface="Hanken Grotesk" pitchFamily="34" charset="-120"/>
               </a:rPr>
-              <a:t>The rideshare fare is 2.50 + 1.75m for m miles. How much is an 8-mile ride, and what does each part of the expression represent?</a:t>
+              <a:t>How could dividing fractions help you share food or materials fairly?</a:t>
             </a:r>
             <a:endParaRPr lang="en-US" sz="1400" dirty="0"/>
           </a:p>
@@ -16143,7 +15998,7 @@
                 <a:ea typeface="Hanken Grotesk" pitchFamily="34" charset="-122"/>
                 <a:cs typeface="Hanken Grotesk" pitchFamily="34" charset="-120"/>
               </a:rPr>
-              <a:t>Substitute</a:t>
+              <a:t>dividend</a:t>
             </a:r>
             <a:endParaRPr lang="en-US" sz="900" dirty="0"/>
           </a:p>
@@ -16190,7 +16045,7 @@
                 <a:ea typeface="Hanken Grotesk" pitchFamily="34" charset="-122"/>
                 <a:cs typeface="Hanken Grotesk" pitchFamily="34" charset="-120"/>
               </a:rPr>
-              <a:t>Variable</a:t>
+              <a:t>divisor</a:t>
             </a:r>
             <a:endParaRPr lang="en-US" sz="900" dirty="0"/>
           </a:p>
@@ -16237,54 +16092,7 @@
                 <a:ea typeface="Hanken Grotesk" pitchFamily="34" charset="-122"/>
                 <a:cs typeface="Hanken Grotesk" pitchFamily="34" charset="-120"/>
               </a:rPr>
-              <a:t>Evaluate</a:t>
-            </a:r>
-            <a:endParaRPr lang="en-US" sz="900" dirty="0"/>
-          </a:p>
-        </p:txBody>
-      </p:sp>
-      <p:sp>
-        <p:nvSpPr>
-          <p:cNvPr id="31" name="Text 29"/>
-          <p:cNvSpPr/>
-          <p:nvPr/>
-        </p:nvSpPr>
-        <p:spPr>
-          <a:xfrm>
-            <a:off x="7520940" y="3227832"/>
-            <a:ext cx="1120140" cy="329184"/>
-          </a:xfrm>
-          <a:prstGeom prst="roundRect">
-            <a:avLst>
-              <a:gd name="adj" fmla="val 13889"/>
-            </a:avLst>
-          </a:prstGeom>
-          <a:solidFill>
-            <a:srgbClr val="FFFFFF"/>
-          </a:solidFill>
-          <a:ln w="12700">
-            <a:solidFill>
-              <a:srgbClr val="D6DBDF"/>
-            </a:solidFill>
-          </a:ln>
-        </p:spPr>
-        <p:txBody>
-          <a:bodyPr wrap="square" rtlCol="0" anchor="ctr"/>
-          <a:lstStyle/>
-          <a:p>
-            <a:pPr algn="ctr" indent="0" marL="0">
-              <a:buNone/>
-            </a:pPr>
-            <a:r>
-              <a:rPr lang="en-US" sz="900" b="1" dirty="0">
-                <a:solidFill>
-                  <a:srgbClr val="17324D"/>
-                </a:solidFill>
-                <a:latin typeface="Hanken Grotesk" pitchFamily="34" charset="0"/>
-                <a:ea typeface="Hanken Grotesk" pitchFamily="34" charset="-122"/>
-                <a:cs typeface="Hanken Grotesk" pitchFamily="34" charset="-120"/>
-              </a:rPr>
-              <a:t>Expression</a:t>
+              <a:t>simplify</a:t>
             </a:r>
             <a:endParaRPr lang="en-US" sz="900" dirty="0"/>
           </a:p>
@@ -16437,7 +16245,7 @@
             </a:avLst>
           </a:prstGeom>
           <a:solidFill>
-            <a:srgbClr val="7A5C8E"/>
+            <a:srgbClr val="2E7D9A"/>
           </a:solidFill>
           <a:ln/>
         </p:spPr>
@@ -16457,7 +16265,7 @@
                 <a:ea typeface="Outfit" pitchFamily="34" charset="-122"/>
                 <a:cs typeface="Outfit" pitchFamily="34" charset="-120"/>
               </a:rPr>
-              <a:t>6.AT.6c</a:t>
+              <a:t>6.NOS.1</a:t>
             </a:r>
             <a:endParaRPr lang="en-US" sz="900" dirty="0"/>
           </a:p>
@@ -16676,7 +16484,7 @@
                 <a:ea typeface="Hanken Grotesk" pitchFamily="34" charset="-122"/>
                 <a:cs typeface="Hanken Grotesk" pitchFamily="34" charset="-120"/>
               </a:rPr>
-              <a:t>Reveal Math Grade 6  ·  Unit 6  ·  Lesson 6-2</a:t>
+              <a:t>Reveal Math Grade 6  ·  Unit 2  ·  Lesson 2-3</a:t>
             </a:r>
             <a:endParaRPr lang="en-US" sz="750" dirty="0"/>
           </a:p>
@@ -16772,7 +16580,7 @@
             </a:avLst>
           </a:prstGeom>
           <a:solidFill>
-            <a:srgbClr val="7A5C8E"/>
+            <a:srgbClr val="2E7D9A"/>
           </a:solidFill>
           <a:ln/>
         </p:spPr>
@@ -16873,7 +16681,7 @@
                 <a:ea typeface="Hanken Grotesk" pitchFamily="34" charset="-122"/>
                 <a:cs typeface="Hanken Grotesk" pitchFamily="34" charset="-120"/>
               </a:rPr>
-              <a:t>During practice on Evaluate Expressions, what strategy did you use when a problem felt tricky?</a:t>
+              <a:t>During practice on Divide Fractions, what strategy did you use when a problem felt tricky?</a:t>
             </a:r>
             <a:endParaRPr lang="en-US" sz="1400" dirty="0"/>
           </a:p>
@@ -17203,7 +17011,7 @@
                 <a:ea typeface="Hanken Grotesk" pitchFamily="34" charset="-122"/>
                 <a:cs typeface="Hanken Grotesk" pitchFamily="34" charset="-120"/>
               </a:rPr>
-              <a:t>Variable</a:t>
+              <a:t>Dividend</a:t>
             </a:r>
             <a:endParaRPr lang="en-US" sz="900" dirty="0"/>
           </a:p>
@@ -17250,7 +17058,7 @@
                 <a:ea typeface="Hanken Grotesk" pitchFamily="34" charset="-122"/>
                 <a:cs typeface="Hanken Grotesk" pitchFamily="34" charset="-120"/>
               </a:rPr>
-              <a:t>Expression</a:t>
+              <a:t>Divisor</a:t>
             </a:r>
             <a:endParaRPr lang="en-US" sz="900" dirty="0"/>
           </a:p>
@@ -17297,7 +17105,7 @@
                 <a:ea typeface="Hanken Grotesk" pitchFamily="34" charset="-122"/>
                 <a:cs typeface="Hanken Grotesk" pitchFamily="34" charset="-120"/>
               </a:rPr>
-              <a:t>Evaluate</a:t>
+              <a:t>Reciprocal</a:t>
             </a:r>
             <a:endParaRPr lang="en-US" sz="900" dirty="0"/>
           </a:p>
@@ -17344,7 +17152,7 @@
                 <a:ea typeface="Hanken Grotesk" pitchFamily="34" charset="-122"/>
                 <a:cs typeface="Hanken Grotesk" pitchFamily="34" charset="-120"/>
               </a:rPr>
-              <a:t>Substitute</a:t>
+              <a:t>Quotient</a:t>
             </a:r>
             <a:endParaRPr lang="en-US" sz="900" dirty="0"/>
           </a:p>
@@ -17497,7 +17305,7 @@
             </a:avLst>
           </a:prstGeom>
           <a:solidFill>
-            <a:srgbClr val="7A5C8E"/>
+            <a:srgbClr val="2E7D9A"/>
           </a:solidFill>
           <a:ln/>
         </p:spPr>
@@ -17517,7 +17325,7 @@
                 <a:ea typeface="Outfit" pitchFamily="34" charset="-122"/>
                 <a:cs typeface="Outfit" pitchFamily="34" charset="-120"/>
               </a:rPr>
-              <a:t>6.AT.6c</a:t>
+              <a:t>6.NOS.1</a:t>
             </a:r>
             <a:endParaRPr lang="en-US" sz="900" dirty="0"/>
           </a:p>
@@ -17736,7 +17544,7 @@
                 <a:ea typeface="Hanken Grotesk" pitchFamily="34" charset="-122"/>
                 <a:cs typeface="Hanken Grotesk" pitchFamily="34" charset="-120"/>
               </a:rPr>
-              <a:t>Reveal Math Grade 6  ·  Unit 6  ·  Lesson 6-2</a:t>
+              <a:t>Reveal Math Grade 6  ·  Unit 2  ·  Lesson 2-3</a:t>
             </a:r>
             <a:endParaRPr lang="en-US" sz="750" dirty="0"/>
           </a:p>
@@ -17832,7 +17640,7 @@
             </a:avLst>
           </a:prstGeom>
           <a:solidFill>
-            <a:srgbClr val="7A5C8E"/>
+            <a:srgbClr val="2E7D9A"/>
           </a:solidFill>
           <a:ln/>
         </p:spPr>
@@ -17891,7 +17699,7 @@
                 <a:ea typeface="Outfit" pitchFamily="34" charset="-122"/>
                 <a:cs typeface="Outfit" pitchFamily="34" charset="-120"/>
               </a:rPr>
-              <a:t>Mix the Track</a:t>
+              <a:t>Detective Agency Case File</a:t>
             </a:r>
             <a:endParaRPr lang="en-US" sz="1100" dirty="0"/>
           </a:p>
@@ -17930,7 +17738,7 @@
                 <a:ea typeface="Hanken Grotesk" pitchFamily="34" charset="-122"/>
                 <a:cs typeface="Hanken Grotesk" pitchFamily="34" charset="-120"/>
               </a:rPr>
-              <a:t>You're a music producer setting up a concert. The total cost of the event is given by the expression 150 + 12s, where s is the number of speakers rented. The venue charges $150 as a base fee, plus $12 for each speaker. How much will it cost for different numbers of speakers?</a:t>
+              <a:t>Agent Rivera is dividing a 3/4-pound evidence bag into portions that each weigh 1/8 pound. She needs to know exactly how many portions she can make for testing. Can you solve the case?</a:t>
             </a:r>
             <a:endParaRPr lang="en-US" sz="1150" dirty="0"/>
           </a:p>
@@ -18155,7 +17963,7 @@
                 <a:ea typeface="Hanken Grotesk" pitchFamily="34" charset="-122"/>
                 <a:cs typeface="Hanken Grotesk" pitchFamily="34" charset="-120"/>
               </a:rPr>
-              <a:t>•  What does the 150 represent in the expression?</a:t>
+              <a:t>•  What is the total weight being divided?</a:t>
             </a:r>
             <a:endParaRPr lang="en-US" sz="1000" dirty="0"/>
           </a:p>
@@ -18175,7 +17983,7 @@
                 <a:ea typeface="Hanken Grotesk" pitchFamily="34" charset="-122"/>
                 <a:cs typeface="Hanken Grotesk" pitchFamily="34" charset="-120"/>
               </a:rPr>
-              <a:t>•  What does the 12s represent?</a:t>
+              <a:t>•  What is the size of each portion?</a:t>
             </a:r>
             <a:endParaRPr lang="en-US" sz="1000" dirty="0"/>
           </a:p>
@@ -18195,7 +18003,7 @@
                 <a:ea typeface="Hanken Grotesk" pitchFamily="34" charset="-122"/>
                 <a:cs typeface="Hanken Grotesk" pitchFamily="34" charset="-120"/>
               </a:rPr>
-              <a:t>•  What happens to the total cost as s gets bigger?</a:t>
+              <a:t>•  Will the answer be more or less than 1?</a:t>
             </a:r>
             <a:endParaRPr lang="en-US" sz="1000" dirty="0"/>
           </a:p>
@@ -18312,7 +18120,7 @@
                 <a:ea typeface="Hanken Grotesk" pitchFamily="34" charset="-122"/>
                 <a:cs typeface="Hanken Grotesk" pitchFamily="34" charset="-120"/>
               </a:rPr>
-              <a:t>•  What if speakers cost $15 each instead?</a:t>
+              <a:t>•  How is dividing fractions different from multiplying them?</a:t>
             </a:r>
             <a:endParaRPr lang="en-US" sz="1000" dirty="0"/>
           </a:p>
@@ -18332,7 +18140,7 @@
                 <a:ea typeface="Hanken Grotesk" pitchFamily="34" charset="-122"/>
                 <a:cs typeface="Hanken Grotesk" pitchFamily="34" charset="-120"/>
               </a:rPr>
-              <a:t>•  How many speakers can we afford with a $300 budget?</a:t>
+              <a:t>•  Why does 'keep, change, flip' work?</a:t>
             </a:r>
             <a:endParaRPr lang="en-US" sz="1000" dirty="0"/>
           </a:p>
@@ -18485,7 +18293,7 @@
             </a:avLst>
           </a:prstGeom>
           <a:solidFill>
-            <a:srgbClr val="7A5C8E"/>
+            <a:srgbClr val="2E7D9A"/>
           </a:solidFill>
           <a:ln/>
         </p:spPr>
@@ -18505,7 +18313,7 @@
                 <a:ea typeface="Outfit" pitchFamily="34" charset="-122"/>
                 <a:cs typeface="Outfit" pitchFamily="34" charset="-120"/>
               </a:rPr>
-              <a:t>6.AT.6c</a:t>
+              <a:t>6.NOS.1</a:t>
             </a:r>
             <a:endParaRPr lang="en-US" sz="900" dirty="0"/>
           </a:p>
@@ -18724,7 +18532,7 @@
                 <a:ea typeface="Hanken Grotesk" pitchFamily="34" charset="-122"/>
                 <a:cs typeface="Hanken Grotesk" pitchFamily="34" charset="-120"/>
               </a:rPr>
-              <a:t>Reveal Math Grade 6  ·  Unit 6  ·  Lesson 6-2</a:t>
+              <a:t>Reveal Math Grade 6  ·  Unit 2  ·  Lesson 2-3</a:t>
             </a:r>
             <a:endParaRPr lang="en-US" sz="750" dirty="0"/>
           </a:p>
@@ -19020,7 +18828,7 @@
                           <a:ea typeface="Hanken Grotesk" pitchFamily="34" charset="-122"/>
                           <a:cs typeface="Hanken Grotesk" pitchFamily="34" charset="-120"/>
                         </a:rPr>
-                        <a:t>Variable</a:t>
+                        <a:t>Dividend</a:t>
                       </a:r>
                       <a:pPr indent="0" marL="0">
                         <a:buNone/>
@@ -19044,7 +18852,7 @@
                           <a:ea typeface="Hanken Grotesk" pitchFamily="34" charset="-122"/>
                           <a:cs typeface="Hanken Grotesk" pitchFamily="34" charset="-120"/>
                         </a:rPr>
-                        <a:t>Variable</a:t>
+                        <a:t>Dividendo</a:t>
                       </a:r>
                       <a:endParaRPr lang="en-US" sz="950" dirty="0">
                         <a:latin typeface="Hanken Grotesk" charset="0"/>
@@ -19112,7 +18920,7 @@
                           <a:ea typeface="Hanken Grotesk" pitchFamily="34" charset="-122"/>
                           <a:cs typeface="Hanken Grotesk" pitchFamily="34" charset="-120"/>
                         </a:rPr>
-                        <a:t>A letter that stands for an unknown number.</a:t>
+                        <a:t>The number you are splitting up in a division problem.</a:t>
                       </a:r>
                       <a:pPr indent="0" marL="0">
                         <a:buNone/>
@@ -19136,7 +18944,7 @@
                           <a:ea typeface="Hanken Grotesk" pitchFamily="34" charset="-122"/>
                           <a:cs typeface="Hanken Grotesk" pitchFamily="34" charset="-120"/>
                         </a:rPr>
-                        <a:t>Una letra que representa un número desconocido.</a:t>
+                        <a:t>El número que estás repartiendo en una división.</a:t>
                       </a:r>
                       <a:endParaRPr lang="en-US" sz="900" dirty="0">
                         <a:latin typeface="Hanken Grotesk" charset="0"/>
@@ -19204,7 +19012,7 @@
                           <a:ea typeface="Hanken Grotesk" pitchFamily="34" charset="-122"/>
                           <a:cs typeface="Hanken Grotesk" pitchFamily="34" charset="-120"/>
                         </a:rPr>
-                        <a:t>In 3x + 5, x can be any number — if x = 2, the expression equals 11; if x = 10, it equals 35</a:t>
+                        <a:t>In 3/4 ÷ 1/2, the dividend is 3/4 — the total amount being split</a:t>
                       </a:r>
                       <a:endParaRPr lang="en-US" sz="900" dirty="0">
                         <a:latin typeface="Hanken Grotesk" charset="0"/>
@@ -19274,7 +19082,7 @@
                           <a:ea typeface="Hanken Grotesk" pitchFamily="34" charset="-122"/>
                           <a:cs typeface="Hanken Grotesk" pitchFamily="34" charset="-120"/>
                         </a:rPr>
-                        <a:t>Expression</a:t>
+                        <a:t>Divisor</a:t>
                       </a:r>
                       <a:pPr indent="0" marL="0">
                         <a:buNone/>
@@ -19298,7 +19106,7 @@
                           <a:ea typeface="Hanken Grotesk" pitchFamily="34" charset="-122"/>
                           <a:cs typeface="Hanken Grotesk" pitchFamily="34" charset="-120"/>
                         </a:rPr>
-                        <a:t>Expresión</a:t>
+                        <a:t>Divisor</a:t>
                       </a:r>
                       <a:endParaRPr lang="en-US" sz="950" dirty="0">
                         <a:latin typeface="Hanken Grotesk" charset="0"/>
@@ -19366,7 +19174,7 @@
                           <a:ea typeface="Hanken Grotesk" pitchFamily="34" charset="-122"/>
                           <a:cs typeface="Hanken Grotesk" pitchFamily="34" charset="-120"/>
                         </a:rPr>
-                        <a:t>A math phrase with numbers and letters, but no equal sign.</a:t>
+                        <a:t>The number you split by in a division problem.</a:t>
                       </a:r>
                       <a:pPr indent="0" marL="0">
                         <a:buNone/>
@@ -19390,7 +19198,7 @@
                           <a:ea typeface="Hanken Grotesk" pitchFamily="34" charset="-122"/>
                           <a:cs typeface="Hanken Grotesk" pitchFamily="34" charset="-120"/>
                         </a:rPr>
-                        <a:t>Una frase matemática con números y letras, pero sin signo igual.</a:t>
+                        <a:t>El número entre el que divides en una división.</a:t>
                       </a:r>
                       <a:endParaRPr lang="en-US" sz="900" dirty="0">
                         <a:latin typeface="Hanken Grotesk" charset="0"/>
@@ -19458,7 +19266,7 @@
                           <a:ea typeface="Hanken Grotesk" pitchFamily="34" charset="-122"/>
                           <a:cs typeface="Hanken Grotesk" pitchFamily="34" charset="-120"/>
                         </a:rPr>
-                        <a:t>2n + 7 is an expression: the 2n means '2 times some number' and the + 7 means 'then add 7'</a:t>
+                        <a:t>In 3/4 ÷ 1/2, the divisor is 1/2 — the size of each group</a:t>
                       </a:r>
                       <a:endParaRPr lang="en-US" sz="900" dirty="0">
                         <a:latin typeface="Hanken Grotesk" charset="0"/>
@@ -19528,7 +19336,7 @@
                           <a:ea typeface="Hanken Grotesk" pitchFamily="34" charset="-122"/>
                           <a:cs typeface="Hanken Grotesk" pitchFamily="34" charset="-120"/>
                         </a:rPr>
-                        <a:t>Evaluate</a:t>
+                        <a:t>Reciprocal</a:t>
                       </a:r>
                       <a:pPr indent="0" marL="0">
                         <a:buNone/>
@@ -19552,7 +19360,7 @@
                           <a:ea typeface="Hanken Grotesk" pitchFamily="34" charset="-122"/>
                           <a:cs typeface="Hanken Grotesk" pitchFamily="34" charset="-120"/>
                         </a:rPr>
-                        <a:t>Evaluar</a:t>
+                        <a:t>Recíproco</a:t>
                       </a:r>
                       <a:endParaRPr lang="en-US" sz="950" dirty="0">
                         <a:latin typeface="Hanken Grotesk" charset="0"/>
@@ -19620,7 +19428,7 @@
                           <a:ea typeface="Hanken Grotesk" pitchFamily="34" charset="-122"/>
                           <a:cs typeface="Hanken Grotesk" pitchFamily="34" charset="-120"/>
                         </a:rPr>
-                        <a:t>To find the value by putting numbers in for the letters.</a:t>
+                        <a:t>A fraction turned upside down.</a:t>
                       </a:r>
                       <a:pPr indent="0" marL="0">
                         <a:buNone/>
@@ -19644,7 +19452,7 @@
                           <a:ea typeface="Hanken Grotesk" pitchFamily="34" charset="-122"/>
                           <a:cs typeface="Hanken Grotesk" pitchFamily="34" charset="-120"/>
                         </a:rPr>
-                        <a:t>Encontrar el valor poniendo números en lugar de las letras.</a:t>
+                        <a:t>Una fracción volteada de arriba abajo.</a:t>
                       </a:r>
                       <a:endParaRPr lang="en-US" sz="900" dirty="0">
                         <a:latin typeface="Hanken Grotesk" charset="0"/>
@@ -19712,7 +19520,7 @@
                           <a:ea typeface="Hanken Grotesk" pitchFamily="34" charset="-122"/>
                           <a:cs typeface="Hanken Grotesk" pitchFamily="34" charset="-120"/>
                         </a:rPr>
-                        <a:t>Evaluate 2n + 7 when n = 4: replace n with 4 → 2(4) + 7 = 8 + 7 = 15</a:t>
+                        <a:t>The reciprocal of 2/3 is 3/2. To divide by 2/3, multiply by 3/2.</a:t>
                       </a:r>
                       <a:endParaRPr lang="en-US" sz="900" dirty="0">
                         <a:latin typeface="Hanken Grotesk" charset="0"/>
@@ -19782,7 +19590,7 @@
                           <a:ea typeface="Hanken Grotesk" pitchFamily="34" charset="-122"/>
                           <a:cs typeface="Hanken Grotesk" pitchFamily="34" charset="-120"/>
                         </a:rPr>
-                        <a:t>Substitute</a:t>
+                        <a:t>Quotient</a:t>
                       </a:r>
                       <a:pPr indent="0" marL="0">
                         <a:buNone/>
@@ -19806,7 +19614,7 @@
                           <a:ea typeface="Hanken Grotesk" pitchFamily="34" charset="-122"/>
                           <a:cs typeface="Hanken Grotesk" pitchFamily="34" charset="-120"/>
                         </a:rPr>
-                        <a:t>Sustituir</a:t>
+                        <a:t>Cociente</a:t>
                       </a:r>
                       <a:endParaRPr lang="en-US" sz="950" dirty="0">
                         <a:latin typeface="Hanken Grotesk" charset="0"/>
@@ -19874,7 +19682,7 @@
                           <a:ea typeface="Hanken Grotesk" pitchFamily="34" charset="-122"/>
                           <a:cs typeface="Hanken Grotesk" pitchFamily="34" charset="-120"/>
                         </a:rPr>
-                        <a:t>To put a number in place of a letter.</a:t>
+                        <a:t>The answer when you divide.</a:t>
                       </a:r>
                       <a:pPr indent="0" marL="0">
                         <a:buNone/>
@@ -19898,7 +19706,7 @@
                           <a:ea typeface="Hanken Grotesk" pitchFamily="34" charset="-122"/>
                           <a:cs typeface="Hanken Grotesk" pitchFamily="34" charset="-120"/>
                         </a:rPr>
-                        <a:t>Poner un número en lugar de una letra.</a:t>
+                        <a:t>La respuesta cuando divides.</a:t>
                       </a:r>
                       <a:endParaRPr lang="en-US" sz="900" dirty="0">
                         <a:latin typeface="Hanken Grotesk" charset="0"/>
@@ -19966,7 +19774,7 @@
                           <a:ea typeface="Hanken Grotesk" pitchFamily="34" charset="-122"/>
                           <a:cs typeface="Hanken Grotesk" pitchFamily="34" charset="-120"/>
                         </a:rPr>
-                        <a:t>Substitute 3 for x in 5x: replace x with 3 → 5(3) = 15</a:t>
+                        <a:t>In 3/4 ÷ 1/4 = 3, the quotient is 3 — three 1/4-size pieces fit into 3/4</a:t>
                       </a:r>
                       <a:endParaRPr lang="en-US" sz="900" dirty="0">
                         <a:latin typeface="Hanken Grotesk" charset="0"/>
@@ -20036,7 +19844,7 @@
                           <a:ea typeface="Hanken Grotesk" pitchFamily="34" charset="-122"/>
                           <a:cs typeface="Hanken Grotesk" pitchFamily="34" charset="-120"/>
                         </a:rPr>
-                        <a:t>Coefficient</a:t>
+                        <a:t>Simplify</a:t>
                       </a:r>
                       <a:pPr indent="0" marL="0">
                         <a:buNone/>
@@ -20060,7 +19868,7 @@
                           <a:ea typeface="Hanken Grotesk" pitchFamily="34" charset="-122"/>
                           <a:cs typeface="Hanken Grotesk" pitchFamily="34" charset="-120"/>
                         </a:rPr>
-                        <a:t>Coeficiente</a:t>
+                        <a:t>Simplificar</a:t>
                       </a:r>
                       <a:endParaRPr lang="en-US" sz="950" dirty="0">
                         <a:latin typeface="Hanken Grotesk" charset="0"/>
@@ -20128,7 +19936,7 @@
                           <a:ea typeface="Hanken Grotesk" pitchFamily="34" charset="-122"/>
                           <a:cs typeface="Hanken Grotesk" pitchFamily="34" charset="-120"/>
                         </a:rPr>
-                        <a:t>The number in front of a letter, like the 3 in 3x.</a:t>
+                        <a:t>To make a fraction smaller using the same parts, like 2/4 = 1/2.</a:t>
                       </a:r>
                       <a:pPr indent="0" marL="0">
                         <a:buNone/>
@@ -20152,7 +19960,7 @@
                           <a:ea typeface="Hanken Grotesk" pitchFamily="34" charset="-122"/>
                           <a:cs typeface="Hanken Grotesk" pitchFamily="34" charset="-120"/>
                         </a:rPr>
-                        <a:t>El número frente a una letra, como el 3 en 3x.</a:t>
+                        <a:t>Hacer una fracción más pequeña con las mismas partes, como 2/4 = 1/2.</a:t>
                       </a:r>
                       <a:endParaRPr lang="en-US" sz="900" dirty="0">
                         <a:latin typeface="Hanken Grotesk" charset="0"/>
@@ -20220,7 +20028,7 @@
                           <a:ea typeface="Hanken Grotesk" pitchFamily="34" charset="-122"/>
                           <a:cs typeface="Hanken Grotesk" pitchFamily="34" charset="-120"/>
                         </a:rPr>
-                        <a:t>In 7m, the coefficient 7 tells you to multiply m by 7 — if m = 3, then 7m = 21</a:t>
+                        <a:t>8/12 → GCF is 4 → 8÷4 / 12÷4 = 2/3</a:t>
                       </a:r>
                       <a:endParaRPr lang="en-US" sz="900" dirty="0">
                         <a:latin typeface="Hanken Grotesk" charset="0"/>
@@ -20276,247 +20084,6 @@
           </a:graphicData>
         </a:graphic>
       </p:graphicFrame>
-      <p:sp>
-        <p:nvSpPr>
-          <p:cNvPr id="18" name="Text 15"/>
-          <p:cNvSpPr/>
-          <p:nvPr/>
-        </p:nvSpPr>
-        <p:spPr>
-          <a:xfrm>
-            <a:off x="411480" y="3520440"/>
-            <a:ext cx="8412480" cy="237744"/>
-          </a:xfrm>
-          <a:prstGeom prst="rect">
-            <a:avLst/>
-          </a:prstGeom>
-          <a:noFill/>
-          <a:ln/>
-        </p:spPr>
-        <p:txBody>
-          <a:bodyPr wrap="square" rtlCol="0" anchor="ctr"/>
-          <a:lstStyle/>
-          <a:p>
-            <a:pPr indent="0" marL="0">
-              <a:buNone/>
-            </a:pPr>
-            <a:r>
-              <a:rPr lang="en-US" sz="950" b="1" dirty="0">
-                <a:solidFill>
-                  <a:srgbClr val="17324D"/>
-                </a:solidFill>
-                <a:latin typeface="Outfit" pitchFamily="34" charset="0"/>
-                <a:ea typeface="Outfit" pitchFamily="34" charset="-122"/>
-                <a:cs typeface="Outfit" pitchFamily="34" charset="-120"/>
-              </a:rPr>
-              <a:t>Expression — example vs. non-example:</a:t>
-            </a:r>
-            <a:endParaRPr lang="en-US" sz="950" dirty="0"/>
-          </a:p>
-        </p:txBody>
-      </p:sp>
-      <p:sp>
-        <p:nvSpPr>
-          <p:cNvPr id="19" name="Shape 16"/>
-          <p:cNvSpPr/>
-          <p:nvPr/>
-        </p:nvSpPr>
-        <p:spPr>
-          <a:xfrm>
-            <a:off x="411480" y="3813048"/>
-            <a:ext cx="4114800" cy="457200"/>
-          </a:xfrm>
-          <a:prstGeom prst="roundRect">
-            <a:avLst>
-              <a:gd name="adj" fmla="val 10000"/>
-            </a:avLst>
-          </a:prstGeom>
-          <a:solidFill>
-            <a:srgbClr val="E7F6F4"/>
-          </a:solidFill>
-          <a:ln w="12700">
-            <a:solidFill>
-              <a:srgbClr val="1FA6A2"/>
-            </a:solidFill>
-            <a:prstDash val="solid"/>
-          </a:ln>
-          <a:effectLst>
-            <a:outerShdw sx="100000" sy="100000" kx="0" ky="0" algn="bl" rotWithShape="0" blurRad="50800" dist="12700" dir="5400000">
-              <a:srgbClr val="1C2E42">
-                <a:alpha val="10000"/>
-              </a:srgbClr>
-            </a:outerShdw>
-          </a:effectLst>
-        </p:spPr>
-      </p:sp>
-      <p:sp>
-        <p:nvSpPr>
-          <p:cNvPr id="20" name="Text 17"/>
-          <p:cNvSpPr/>
-          <p:nvPr/>
-        </p:nvSpPr>
-        <p:spPr>
-          <a:xfrm>
-            <a:off x="521208" y="3813048"/>
-            <a:ext cx="3895344" cy="457200"/>
-          </a:xfrm>
-          <a:prstGeom prst="rect">
-            <a:avLst/>
-          </a:prstGeom>
-          <a:noFill/>
-          <a:ln/>
-        </p:spPr>
-        <p:txBody>
-          <a:bodyPr wrap="square" rtlCol="0" anchor="ctr"/>
-          <a:lstStyle/>
-          <a:p>
-            <a:pPr indent="0" marL="0">
-              <a:buNone/>
-            </a:pPr>
-            <a:r>
-              <a:rPr lang="en-US" sz="900" b="1" dirty="0">
-                <a:solidFill>
-                  <a:srgbClr val="1FA6A2"/>
-                </a:solidFill>
-                <a:latin typeface="Hanken Grotesk" pitchFamily="34" charset="0"/>
-                <a:ea typeface="Hanken Grotesk" pitchFamily="34" charset="-122"/>
-                <a:cs typeface="Hanken Grotesk" pitchFamily="34" charset="-120"/>
-              </a:rPr>
-              <a:t>✓ </a:t>
-            </a:r>
-            <a:pPr indent="0" marL="0">
-              <a:buNone/>
-            </a:pPr>
-            <a:r>
-              <a:rPr lang="en-US" sz="900" b="1" dirty="0">
-                <a:solidFill>
-                  <a:srgbClr val="17324D"/>
-                </a:solidFill>
-                <a:latin typeface="Hanken Grotesk" pitchFamily="34" charset="0"/>
-                <a:ea typeface="Hanken Grotesk" pitchFamily="34" charset="-122"/>
-                <a:cs typeface="Hanken Grotesk" pitchFamily="34" charset="-120"/>
-              </a:rPr>
-              <a:t>3x + 5  </a:t>
-            </a:r>
-            <a:pPr indent="0" marL="0">
-              <a:buNone/>
-            </a:pPr>
-            <a:r>
-              <a:rPr lang="en-US" sz="800" dirty="0">
-                <a:solidFill>
-                  <a:srgbClr val="24323F"/>
-                </a:solidFill>
-                <a:latin typeface="Hanken Grotesk" pitchFamily="34" charset="0"/>
-                <a:ea typeface="Hanken Grotesk" pitchFamily="34" charset="-122"/>
-                <a:cs typeface="Hanken Grotesk" pitchFamily="34" charset="-120"/>
-              </a:rPr>
-              <a:t>It has terms and operations but no equal sign.</a:t>
-            </a:r>
-            <a:endParaRPr lang="en-US" sz="900" dirty="0"/>
-          </a:p>
-        </p:txBody>
-      </p:sp>
-      <p:sp>
-        <p:nvSpPr>
-          <p:cNvPr id="21" name="Shape 18"/>
-          <p:cNvSpPr/>
-          <p:nvPr/>
-        </p:nvSpPr>
-        <p:spPr>
-          <a:xfrm>
-            <a:off x="4663440" y="3813048"/>
-            <a:ext cx="4114800" cy="457200"/>
-          </a:xfrm>
-          <a:prstGeom prst="roundRect">
-            <a:avLst>
-              <a:gd name="adj" fmla="val 10000"/>
-            </a:avLst>
-          </a:prstGeom>
-          <a:solidFill>
-            <a:srgbClr val="FDECEA"/>
-          </a:solidFill>
-          <a:ln w="12700">
-            <a:solidFill>
-              <a:srgbClr val="E2A39B"/>
-            </a:solidFill>
-            <a:prstDash val="solid"/>
-          </a:ln>
-          <a:effectLst>
-            <a:outerShdw sx="100000" sy="100000" kx="0" ky="0" algn="bl" rotWithShape="0" blurRad="50800" dist="12700" dir="5400000">
-              <a:srgbClr val="1C2E42">
-                <a:alpha val="10000"/>
-              </a:srgbClr>
-            </a:outerShdw>
-          </a:effectLst>
-        </p:spPr>
-      </p:sp>
-      <p:sp>
-        <p:nvSpPr>
-          <p:cNvPr id="22" name="Text 19"/>
-          <p:cNvSpPr/>
-          <p:nvPr/>
-        </p:nvSpPr>
-        <p:spPr>
-          <a:xfrm>
-            <a:off x="4773168" y="3813048"/>
-            <a:ext cx="3895344" cy="457200"/>
-          </a:xfrm>
-          <a:prstGeom prst="rect">
-            <a:avLst/>
-          </a:prstGeom>
-          <a:noFill/>
-          <a:ln/>
-        </p:spPr>
-        <p:txBody>
-          <a:bodyPr wrap="square" rtlCol="0" anchor="ctr"/>
-          <a:lstStyle/>
-          <a:p>
-            <a:pPr indent="0" marL="0">
-              <a:buNone/>
-            </a:pPr>
-            <a:r>
-              <a:rPr lang="en-US" sz="900" b="1" dirty="0">
-                <a:solidFill>
-                  <a:srgbClr val="C0392B"/>
-                </a:solidFill>
-                <a:latin typeface="Hanken Grotesk" pitchFamily="34" charset="0"/>
-                <a:ea typeface="Hanken Grotesk" pitchFamily="34" charset="-122"/>
-                <a:cs typeface="Hanken Grotesk" pitchFamily="34" charset="-120"/>
-              </a:rPr>
-              <a:t>✗ </a:t>
-            </a:r>
-            <a:pPr indent="0" marL="0">
-              <a:buNone/>
-            </a:pPr>
-            <a:r>
-              <a:rPr lang="en-US" sz="900" b="1" dirty="0">
-                <a:solidFill>
-                  <a:srgbClr val="17324D"/>
-                </a:solidFill>
-                <a:latin typeface="Hanken Grotesk" pitchFamily="34" charset="0"/>
-                <a:ea typeface="Hanken Grotesk" pitchFamily="34" charset="-122"/>
-                <a:cs typeface="Hanken Grotesk" pitchFamily="34" charset="-120"/>
-              </a:rPr>
-              <a:t>3x + 5 = 11  </a:t>
-            </a:r>
-            <a:pPr indent="0" marL="0">
-              <a:buNone/>
-            </a:pPr>
-            <a:r>
-              <a:rPr lang="en-US" sz="800" dirty="0">
-                <a:solidFill>
-                  <a:srgbClr val="24323F"/>
-                </a:solidFill>
-                <a:latin typeface="Hanken Grotesk" pitchFamily="34" charset="0"/>
-                <a:ea typeface="Hanken Grotesk" pitchFamily="34" charset="-122"/>
-                <a:cs typeface="Hanken Grotesk" pitchFamily="34" charset="-120"/>
-              </a:rPr>
-              <a:t>That is an equation because it has an equal sign.</a:t>
-            </a:r>
-            <a:endParaRPr lang="en-US" sz="900" dirty="0"/>
-          </a:p>
-        </p:txBody>
-      </p:sp>
     </p:spTree>
   </p:cSld>
   <p:clrMapOvr>
@@ -20664,7 +20231,7 @@
             </a:avLst>
           </a:prstGeom>
           <a:solidFill>
-            <a:srgbClr val="7A5C8E"/>
+            <a:srgbClr val="2E7D9A"/>
           </a:solidFill>
           <a:ln/>
         </p:spPr>
@@ -20684,7 +20251,7 @@
                 <a:ea typeface="Outfit" pitchFamily="34" charset="-122"/>
                 <a:cs typeface="Outfit" pitchFamily="34" charset="-120"/>
               </a:rPr>
-              <a:t>6.AT.6c</a:t>
+              <a:t>6.NOS.1</a:t>
             </a:r>
             <a:endParaRPr lang="en-US" sz="900" dirty="0"/>
           </a:p>
@@ -20903,7 +20470,7 @@
                 <a:ea typeface="Hanken Grotesk" pitchFamily="34" charset="-122"/>
                 <a:cs typeface="Hanken Grotesk" pitchFamily="34" charset="-120"/>
               </a:rPr>
-              <a:t>Reveal Math Grade 6  ·  Unit 6  ·  Lesson 6-2</a:t>
+              <a:t>Reveal Math Grade 6  ·  Unit 2  ·  Lesson 2-3</a:t>
             </a:r>
             <a:endParaRPr lang="en-US" sz="750" dirty="0"/>
           </a:p>
@@ -20999,7 +20566,7 @@
             </a:avLst>
           </a:prstGeom>
           <a:solidFill>
-            <a:srgbClr val="7A5C8E"/>
+            <a:srgbClr val="2E7D9A"/>
           </a:solidFill>
           <a:ln/>
         </p:spPr>
@@ -21058,7 +20625,7 @@
                 <a:ea typeface="Outfit" pitchFamily="34" charset="-122"/>
                 <a:cs typeface="Outfit" pitchFamily="34" charset="-120"/>
               </a:rPr>
-              <a:t>How do we find the value of an expression?</a:t>
+              <a:t>How do I divide one fraction by another fraction?</a:t>
             </a:r>
             <a:endParaRPr lang="en-US" sz="1200" dirty="0"/>
           </a:p>
@@ -21079,7 +20646,7 @@
             <a:avLst/>
           </a:prstGeom>
           <a:solidFill>
-            <a:srgbClr val="7A5C8E"/>
+            <a:srgbClr val="2E7D9A"/>
           </a:solidFill>
           <a:ln/>
         </p:spPr>
@@ -21156,7 +20723,7 @@
                 <a:ea typeface="Hanken Grotesk" pitchFamily="34" charset="-122"/>
                 <a:cs typeface="Hanken Grotesk" pitchFamily="34" charset="-120"/>
               </a:rPr>
-              <a:t>Let's try a simpler one. Find 150 + 12s when s = 1.</a:t>
+              <a:t>Let's try 1/2 ÷ 1/4. Keep 1/2, change to ×, flip 1/4 to 4/1.</a:t>
             </a:r>
             <a:endParaRPr lang="en-US" sz="1050" dirty="0"/>
           </a:p>
@@ -21177,7 +20744,7 @@
             <a:avLst/>
           </a:prstGeom>
           <a:solidFill>
-            <a:srgbClr val="7A5C8E"/>
+            <a:srgbClr val="2E7D9A"/>
           </a:solidFill>
           <a:ln/>
         </p:spPr>
@@ -21254,7 +20821,7 @@
                 <a:ea typeface="Hanken Grotesk" pitchFamily="34" charset="-122"/>
                 <a:cs typeface="Hanken Grotesk" pitchFamily="34" charset="-120"/>
               </a:rPr>
-              <a:t>What goes in place of s? Yes, 1. So we have 150 + 12 × 1.</a:t>
+              <a:t>Multiply: 1/2 × 4/1 = 4/2.</a:t>
             </a:r>
             <a:endParaRPr lang="en-US" sz="1050" dirty="0"/>
           </a:p>
@@ -21275,7 +20842,7 @@
             <a:avLst/>
           </a:prstGeom>
           <a:solidFill>
-            <a:srgbClr val="7A5C8E"/>
+            <a:srgbClr val="2E7D9A"/>
           </a:solidFill>
           <a:ln/>
         </p:spPr>
@@ -21352,7 +20919,7 @@
                 <a:ea typeface="Hanken Grotesk" pitchFamily="34" charset="-122"/>
                 <a:cs typeface="Hanken Grotesk" pitchFamily="34" charset="-120"/>
               </a:rPr>
-              <a:t>12 × 1 = 12, then 150 + 12 = 162. So 1 speaker costs $162.</a:t>
+              <a:t>Simplify: 4/2 = 2. So 1/2 ÷ 1/4 = 2.</a:t>
             </a:r>
             <a:endParaRPr lang="en-US" sz="1050" dirty="0"/>
           </a:p>
@@ -21528,7 +21095,7 @@
                 <a:ea typeface="Hanken Grotesk" pitchFamily="34" charset="-122"/>
                 <a:cs typeface="Hanken Grotesk" pitchFamily="34" charset="-120"/>
               </a:rPr>
-              <a:t>The concert cost is 150 + 12s, where s is the number of speakers. How do you find the cost for 5 speakers, and why does this one expression work for any number of speakers?</a:t>
+              <a:t>Agent Rivera splits a 3/4-pound evidence bag into 1/8-pound portions. Will she get more or fewer than 1 portion? Estimate before solving.</a:t>
             </a:r>
             <a:endParaRPr lang="en-US" sz="1000" dirty="0"/>
           </a:p>
@@ -21595,7 +21162,7 @@
             <a:r>
               <a:rPr lang="en-US" sz="950" b="1" dirty="0">
                 <a:solidFill>
-                  <a:srgbClr val="7A5C8E"/>
+                  <a:srgbClr val="2E7D9A"/>
                 </a:solidFill>
                 <a:latin typeface="Outfit" pitchFamily="34" charset="0"/>
                 <a:ea typeface="Outfit" pitchFamily="34" charset="-122"/>
@@ -21640,7 +21207,7 @@
                 <a:ea typeface="Hanken Grotesk" pitchFamily="34" charset="-122"/>
                 <a:cs typeface="Hanken Grotesk" pitchFamily="34" charset="-120"/>
               </a:rPr>
-              <a:t>Replace the variable with its number, then follow the order of operations to find the total.</a:t>
+              <a:t>To divide fractions, multiply the first fraction by the reciprocal of the second, then simplify the answer.</a:t>
             </a:r>
             <a:endParaRPr lang="en-US" sz="950" dirty="0"/>
           </a:p>
